--- a/static/decks/2899.HK.pptx
+++ b/static/decks/2899.HK.pptx
@@ -107,6 +107,451 @@
     </a:lvl9pPr>
   </p:defaultTextStyle>
 </p:presentation>
+</file>
+
+<file path=ppt/charts/chart1.xml><?xml version="1.0" encoding="utf-8"?>
+<c:chartSpace xmlns:c="http://schemas.openxmlformats.org/drawingml/2006/chart" xmlns:a="http://schemas.openxmlformats.org/drawingml/2006/main" xmlns:r="http://schemas.openxmlformats.org/officeDocument/2006/relationships">
+  <c:date1904 val="0"/>
+  <c:chart>
+    <c:autoTitleDeleted val="0"/>
+    <c:plotArea>
+      <c:lineChart>
+        <c:grouping val="standard"/>
+        <c:varyColors val="0"/>
+        <c:ser>
+          <c:idx val="0"/>
+          <c:order val="0"/>
+          <c:tx>
+            <c:strRef>
+              <c:f>Sheet1!$B$1</c:f>
+              <c:strCache>
+                <c:ptCount val="1"/>
+                <c:pt idx="0">
+                  <c:v>Close</c:v>
+                </c:pt>
+              </c:strCache>
+            </c:strRef>
+          </c:tx>
+          <c:spPr>
+            <a:ln w="19050">
+              <a:solidFill>
+                <a:srgbClr val="A28860"/>
+              </a:solidFill>
+            </a:ln>
+          </c:spPr>
+          <c:marker>
+            <c:symbol val="none"/>
+          </c:marker>
+          <c:cat>
+            <c:strRef>
+              <c:f>Sheet1!$A$2:$A$51</c:f>
+              <c:strCache>
+                <c:ptCount val="50"/>
+                <c:pt idx="0">
+                  <c:v>05-13</c:v>
+                </c:pt>
+                <c:pt idx="1">
+                  <c:v>05-20</c:v>
+                </c:pt>
+                <c:pt idx="2">
+                  <c:v>05-27</c:v>
+                </c:pt>
+                <c:pt idx="3">
+                  <c:v>06-03</c:v>
+                </c:pt>
+                <c:pt idx="4">
+                  <c:v>06-10</c:v>
+                </c:pt>
+                <c:pt idx="5">
+                  <c:v>06-17</c:v>
+                </c:pt>
+                <c:pt idx="6">
+                  <c:v>06-24</c:v>
+                </c:pt>
+                <c:pt idx="7">
+                  <c:v>07-02</c:v>
+                </c:pt>
+                <c:pt idx="8">
+                  <c:v>07-09</c:v>
+                </c:pt>
+                <c:pt idx="9">
+                  <c:v>07-16</c:v>
+                </c:pt>
+                <c:pt idx="10">
+                  <c:v>07-23</c:v>
+                </c:pt>
+                <c:pt idx="11">
+                  <c:v>07-30</c:v>
+                </c:pt>
+                <c:pt idx="12">
+                  <c:v>08-06</c:v>
+                </c:pt>
+                <c:pt idx="13">
+                  <c:v>08-13</c:v>
+                </c:pt>
+                <c:pt idx="14">
+                  <c:v>08-20</c:v>
+                </c:pt>
+                <c:pt idx="15">
+                  <c:v>08-27</c:v>
+                </c:pt>
+                <c:pt idx="16">
+                  <c:v>09-03</c:v>
+                </c:pt>
+                <c:pt idx="17">
+                  <c:v>09-10</c:v>
+                </c:pt>
+                <c:pt idx="18">
+                  <c:v>09-17</c:v>
+                </c:pt>
+                <c:pt idx="19">
+                  <c:v>09-24</c:v>
+                </c:pt>
+                <c:pt idx="20">
+                  <c:v>10-02</c:v>
+                </c:pt>
+                <c:pt idx="21">
+                  <c:v>10-10</c:v>
+                </c:pt>
+                <c:pt idx="22">
+                  <c:v>10-17</c:v>
+                </c:pt>
+                <c:pt idx="23">
+                  <c:v>10-24</c:v>
+                </c:pt>
+                <c:pt idx="24">
+                  <c:v>11-03</c:v>
+                </c:pt>
+                <c:pt idx="25">
+                  <c:v>11-10</c:v>
+                </c:pt>
+                <c:pt idx="26">
+                  <c:v>11-17</c:v>
+                </c:pt>
+                <c:pt idx="27">
+                  <c:v>11-24</c:v>
+                </c:pt>
+                <c:pt idx="28">
+                  <c:v>12-01</c:v>
+                </c:pt>
+                <c:pt idx="29">
+                  <c:v>12-08</c:v>
+                </c:pt>
+                <c:pt idx="30">
+                  <c:v>12-15</c:v>
+                </c:pt>
+                <c:pt idx="31">
+                  <c:v>12-22</c:v>
+                </c:pt>
+                <c:pt idx="32">
+                  <c:v>12-31</c:v>
+                </c:pt>
+                <c:pt idx="33">
+                  <c:v>01-08</c:v>
+                </c:pt>
+                <c:pt idx="34">
+                  <c:v>01-15</c:v>
+                </c:pt>
+                <c:pt idx="35">
+                  <c:v>01-22</c:v>
+                </c:pt>
+                <c:pt idx="36">
+                  <c:v>01-29</c:v>
+                </c:pt>
+                <c:pt idx="37">
+                  <c:v>02-05</c:v>
+                </c:pt>
+                <c:pt idx="38">
+                  <c:v>02-12</c:v>
+                </c:pt>
+                <c:pt idx="39">
+                  <c:v>02-24</c:v>
+                </c:pt>
+                <c:pt idx="40">
+                  <c:v>03-03</c:v>
+                </c:pt>
+                <c:pt idx="41">
+                  <c:v>03-10</c:v>
+                </c:pt>
+                <c:pt idx="42">
+                  <c:v>03-17</c:v>
+                </c:pt>
+                <c:pt idx="43">
+                  <c:v>03-24</c:v>
+                </c:pt>
+                <c:pt idx="44">
+                  <c:v>03-31</c:v>
+                </c:pt>
+                <c:pt idx="45">
+                  <c:v>04-10</c:v>
+                </c:pt>
+                <c:pt idx="46">
+                  <c:v>04-17</c:v>
+                </c:pt>
+                <c:pt idx="47">
+                  <c:v>04-24</c:v>
+                </c:pt>
+                <c:pt idx="48">
+                  <c:v>05-04</c:v>
+                </c:pt>
+                <c:pt idx="49">
+                  <c:v>05-11</c:v>
+                </c:pt>
+              </c:strCache>
+            </c:strRef>
+          </c:cat>
+          <c:val>
+            <c:numRef>
+              <c:f>Sheet1!$B$2:$B$51</c:f>
+              <c:numCache>
+                <c:formatCode>General</c:formatCode>
+                <c:ptCount val="50"/>
+                <c:pt idx="0">
+                  <c:v>17.5</c:v>
+                </c:pt>
+                <c:pt idx="1">
+                  <c:v>17.5</c:v>
+                </c:pt>
+                <c:pt idx="2">
+                  <c:v>17.860000610351562</c:v>
+                </c:pt>
+                <c:pt idx="3">
+                  <c:v>18.15999984741211</c:v>
+                </c:pt>
+                <c:pt idx="4">
+                  <c:v>18.399999618530273</c:v>
+                </c:pt>
+                <c:pt idx="5">
+                  <c:v>19.700000762939453</c:v>
+                </c:pt>
+                <c:pt idx="6">
+                  <c:v>19.260000228881836</c:v>
+                </c:pt>
+                <c:pt idx="7">
+                  <c:v>20.600000381469727</c:v>
+                </c:pt>
+                <c:pt idx="8">
+                  <c:v>20.0</c:v>
+                </c:pt>
+                <c:pt idx="9">
+                  <c:v>20.549999237060547</c:v>
+                </c:pt>
+                <c:pt idx="10">
+                  <c:v>22.700000762939453</c:v>
+                </c:pt>
+                <c:pt idx="11">
+                  <c:v>22.299999237060547</c:v>
+                </c:pt>
+                <c:pt idx="12">
+                  <c:v>22.200000762939453</c:v>
+                </c:pt>
+                <c:pt idx="13">
+                  <c:v>23.700000762939453</c:v>
+                </c:pt>
+                <c:pt idx="14">
+                  <c:v>23.260000228881836</c:v>
+                </c:pt>
+                <c:pt idx="15">
+                  <c:v>24.739999771118164</c:v>
+                </c:pt>
+                <c:pt idx="16">
+                  <c:v>27.600000381469727</c:v>
+                </c:pt>
+                <c:pt idx="17">
+                  <c:v>29.0</c:v>
+                </c:pt>
+                <c:pt idx="18">
+                  <c:v>28.780000686645508</c:v>
+                </c:pt>
+                <c:pt idx="19">
+                  <c:v>29.639999389648438</c:v>
+                </c:pt>
+                <c:pt idx="20">
+                  <c:v>33.900001525878906</c:v>
+                </c:pt>
+                <c:pt idx="21">
+                  <c:v>33.65999984741211</c:v>
+                </c:pt>
+                <c:pt idx="22">
+                  <c:v>32.599998474121094</c:v>
+                </c:pt>
+                <c:pt idx="23">
+                  <c:v>32.560001373291016</c:v>
+                </c:pt>
+                <c:pt idx="24">
+                  <c:v>31.719999313354492</c:v>
+                </c:pt>
+                <c:pt idx="25">
+                  <c:v>33.18000030517578</c:v>
+                </c:pt>
+                <c:pt idx="26">
+                  <c:v>32.119998931884766</c:v>
+                </c:pt>
+                <c:pt idx="27">
+                  <c:v>30.3799991607666</c:v>
+                </c:pt>
+                <c:pt idx="28">
+                  <c:v>32.31999969482422</c:v>
+                </c:pt>
+                <c:pt idx="29">
+                  <c:v>33.939998626708984</c:v>
+                </c:pt>
+                <c:pt idx="30">
+                  <c:v>34.459999084472656</c:v>
+                </c:pt>
+                <c:pt idx="31">
+                  <c:v>35.380001068115234</c:v>
+                </c:pt>
+                <c:pt idx="32">
+                  <c:v>35.65999984741211</c:v>
+                </c:pt>
+                <c:pt idx="33">
+                  <c:v>37.20000076293945</c:v>
+                </c:pt>
+                <c:pt idx="34">
+                  <c:v>40.0</c:v>
+                </c:pt>
+                <c:pt idx="35">
+                  <c:v>39.97999954223633</c:v>
+                </c:pt>
+                <c:pt idx="36">
+                  <c:v>46.13999938964844</c:v>
+                </c:pt>
+                <c:pt idx="37">
+                  <c:v>39.65999984741211</c:v>
+                </c:pt>
+                <c:pt idx="38">
+                  <c:v>45.02000045776367</c:v>
+                </c:pt>
+                <c:pt idx="39">
+                  <c:v>44.02000045776367</c:v>
+                </c:pt>
+                <c:pt idx="40">
+                  <c:v>43.220001220703125</c:v>
+                </c:pt>
+                <c:pt idx="41">
+                  <c:v>39.939998626708984</c:v>
+                </c:pt>
+                <c:pt idx="42">
+                  <c:v>36.939998626708984</c:v>
+                </c:pt>
+                <c:pt idx="43">
+                  <c:v>34.86000061035156</c:v>
+                </c:pt>
+                <c:pt idx="44">
+                  <c:v>34.36000061035156</c:v>
+                </c:pt>
+                <c:pt idx="45">
+                  <c:v>36.47999954223633</c:v>
+                </c:pt>
+                <c:pt idx="46">
+                  <c:v>36.619998931884766</c:v>
+                </c:pt>
+                <c:pt idx="47">
+                  <c:v>36.79999923706055</c:v>
+                </c:pt>
+                <c:pt idx="48">
+                  <c:v>35.79999923706055</c:v>
+                </c:pt>
+                <c:pt idx="49">
+                  <c:v>37.779998779296875</c:v>
+                </c:pt>
+              </c:numCache>
+            </c:numRef>
+          </c:val>
+          <c:smooth val="0"/>
+        </c:ser>
+        <c:marker val="1"/>
+        <c:smooth val="0"/>
+        <c:axId val="2118791784"/>
+        <c:axId val="2140495176"/>
+      </c:lineChart>
+      <c:catAx>
+        <c:axId val="2118791784"/>
+        <c:scaling>
+          <c:orientation val="minMax"/>
+        </c:scaling>
+        <c:delete val="0"/>
+        <c:axPos val="b"/>
+        <c:majorTickMark val="out"/>
+        <c:minorTickMark val="none"/>
+        <c:tickLblPos val="nextTo"/>
+        <c:spPr>
+          <a:ln>
+            <a:noFill/>
+          </a:ln>
+        </c:spPr>
+        <c:txPr>
+          <a:bodyPr/>
+          <a:lstStyle/>
+          <a:p>
+            <a:pPr>
+              <a:defRPr sz="700">
+                <a:solidFill>
+                  <a:srgbClr val="9A9A9A"/>
+                </a:solidFill>
+                <a:latin typeface="Calibri"/>
+              </a:defRPr>
+            </a:pPr>
+          </a:p>
+        </c:txPr>
+        <c:crossAx val="2140495176"/>
+        <c:crosses val="autoZero"/>
+        <c:auto val="1"/>
+        <c:lblAlgn val="ctr"/>
+        <c:lblOffset val="100"/>
+        <c:noMultiLvlLbl val="0"/>
+      </c:catAx>
+      <c:valAx>
+        <c:axId val="2140495176"/>
+        <c:scaling/>
+        <c:delete val="0"/>
+        <c:axPos val="l"/>
+        <c:majorGridlines/>
+        <c:majorTickMark val="out"/>
+        <c:minorTickMark val="none"/>
+        <c:tickLblPos val="nextTo"/>
+        <c:spPr>
+          <a:ln>
+            <a:noFill/>
+          </a:ln>
+        </c:spPr>
+        <c:txPr>
+          <a:bodyPr/>
+          <a:lstStyle/>
+          <a:p>
+            <a:pPr>
+              <a:defRPr sz="700">
+                <a:solidFill>
+                  <a:srgbClr val="9A9A9A"/>
+                </a:solidFill>
+                <a:latin typeface="Calibri"/>
+              </a:defRPr>
+            </a:pPr>
+          </a:p>
+        </c:txPr>
+        <c:crossAx val="2118791784"/>
+        <c:crosses val="autoZero"/>
+      </c:valAx>
+    </c:plotArea>
+    <c:plotVisOnly val="1"/>
+    <c:dispBlanksAs val="gap"/>
+    <c:showDLblsOverMax val="0"/>
+  </c:chart>
+  <c:txPr>
+    <a:bodyPr/>
+    <a:lstStyle/>
+    <a:p>
+      <a:pPr>
+        <a:defRPr sz="1800"/>
+      </a:pPr>
+      <a:endParaRPr lang="en-US"/>
+    </a:p>
+  </c:txPr>
+  <c:externalData r:id="rId1">
+    <c:autoUpdate val="0"/>
+  </c:externalData>
+</c:chartSpace>
 </file>
 
 <file path=ppt/slideLayouts/slideLayout1.xml><?xml version="1.0" encoding="utf-8"?>
@@ -3339,7 +3784,7 @@
                 </a:solidFill>
                 <a:latin typeface="Georgia"/>
               </a:rPr>
-              <a:t>2899.HK</a:t>
+              <a:t>Zijin Mining Group Company Limited</a:t>
             </a:r>
           </a:p>
         </p:txBody>
@@ -3374,7 +3819,7 @@
                 </a:solidFill>
                 <a:latin typeface="Calibri"/>
               </a:rPr>
-              <a:t>2899.HK  ·  —  ·  —  ·  —</a:t>
+              <a:t>2899.HK  ·  Basic Materials  ·  Gold  ·  —</a:t>
             </a:r>
           </a:p>
         </p:txBody>
@@ -3808,7 +4253,7 @@
                 </a:solidFill>
                 <a:latin typeface="Calibri"/>
               </a:rPr>
-              <a:t>51.89</a:t>
+              <a:t>CNY 51.89</a:t>
             </a:r>
           </a:p>
         </p:txBody>
@@ -3968,7 +4413,7 @@
                 </a:solidFill>
                 <a:latin typeface="Calibri"/>
               </a:rPr>
-              <a:t>+10278.0%</a:t>
+              <a:t>+50.1%</a:t>
             </a:r>
           </a:p>
         </p:txBody>
@@ -4117,7 +4562,7 @@
                 </a:solidFill>
                 <a:latin typeface="Calibri"/>
               </a:rPr>
-              <a:t>0.50</a:t>
+              <a:t>CNY 34.58</a:t>
             </a:r>
           </a:p>
         </p:txBody>
@@ -4187,7 +4632,7 @@
                 </a:solidFill>
                 <a:latin typeface="Calibri"/>
               </a:rPr>
-              <a:t>—</a:t>
+              <a:t>CNY 905.9B</a:t>
             </a:r>
           </a:p>
         </p:txBody>
@@ -4327,7 +4772,7 @@
                 </a:solidFill>
                 <a:latin typeface="Calibri"/>
               </a:rPr>
-              <a:t>—</a:t>
+              <a:t>9.6x</a:t>
             </a:r>
           </a:p>
         </p:txBody>
@@ -4397,7 +4842,7 @@
                 </a:solidFill>
                 <a:latin typeface="Calibri"/>
               </a:rPr>
-              <a:t>—</a:t>
+              <a:t>3.20%</a:t>
             </a:r>
           </a:p>
         </p:txBody>
@@ -4467,7 +4912,7 @@
                 </a:solidFill>
                 <a:latin typeface="Calibri"/>
               </a:rPr>
-              <a:t/>
+              <a:t>CNY</a:t>
             </a:r>
           </a:p>
         </p:txBody>
@@ -4612,11 +5057,11 @@
             <a:r>
               <a:rPr sz="1400" b="0">
                 <a:solidFill>
-                  <a:srgbClr val="5C5C5C"/>
-                </a:solidFill>
-                <a:latin typeface="Calibri"/>
-              </a:rPr>
-              <a:t>—</a:t>
+                  <a:srgbClr val="2F7D4F"/>
+                </a:solidFill>
+                <a:latin typeface="Calibri"/>
+              </a:rPr>
+              <a:t>+1.0%</a:t>
             </a:r>
           </a:p>
         </p:txBody>
@@ -4682,11 +5127,11 @@
             <a:r>
               <a:rPr sz="1400" b="0">
                 <a:solidFill>
-                  <a:srgbClr val="5C5C5C"/>
-                </a:solidFill>
-                <a:latin typeface="Calibri"/>
-              </a:rPr>
-              <a:t>—</a:t>
+                  <a:srgbClr val="2F7D4F"/>
+                </a:solidFill>
+                <a:latin typeface="Calibri"/>
+              </a:rPr>
+              <a:t>+4.1%</a:t>
             </a:r>
           </a:p>
         </p:txBody>
@@ -4752,11 +5197,11 @@
             <a:r>
               <a:rPr sz="1400" b="0">
                 <a:solidFill>
-                  <a:srgbClr val="5C5C5C"/>
-                </a:solidFill>
-                <a:latin typeface="Calibri"/>
-              </a:rPr>
-              <a:t>—</a:t>
+                  <a:srgbClr val="2F7D4F"/>
+                </a:solidFill>
+                <a:latin typeface="Calibri"/>
+              </a:rPr>
+              <a:t>+6.1%</a:t>
             </a:r>
           </a:p>
         </p:txBody>
@@ -4822,11 +5267,11 @@
             <a:r>
               <a:rPr sz="1400" b="0">
                 <a:solidFill>
-                  <a:srgbClr val="5C5C5C"/>
-                </a:solidFill>
-                <a:latin typeface="Calibri"/>
-              </a:rPr>
-              <a:t>—</a:t>
+                  <a:srgbClr val="B83227"/>
+                </a:solidFill>
+                <a:latin typeface="Calibri"/>
+              </a:rPr>
+              <a:t>-6.8%</a:t>
             </a:r>
           </a:p>
         </p:txBody>
@@ -4892,11 +5337,11 @@
             <a:r>
               <a:rPr sz="1400" b="0">
                 <a:solidFill>
-                  <a:srgbClr val="5C5C5C"/>
-                </a:solidFill>
-                <a:latin typeface="Calibri"/>
-              </a:rPr>
-              <a:t>—</a:t>
+                  <a:srgbClr val="2F7D4F"/>
+                </a:solidFill>
+                <a:latin typeface="Calibri"/>
+              </a:rPr>
+              <a:t>+29.3%</a:t>
             </a:r>
           </a:p>
         </p:txBody>
@@ -4962,11 +5407,11 @@
             <a:r>
               <a:rPr sz="1400" b="0">
                 <a:solidFill>
-                  <a:srgbClr val="5C5C5C"/>
-                </a:solidFill>
-                <a:latin typeface="Calibri"/>
-              </a:rPr>
-              <a:t>—</a:t>
+                  <a:srgbClr val="2F7D4F"/>
+                </a:solidFill>
+                <a:latin typeface="Calibri"/>
+              </a:rPr>
+              <a:t>+5.1%</a:t>
             </a:r>
           </a:p>
         </p:txBody>
@@ -5080,7 +5525,7 @@
                 </a:solidFill>
                 <a:latin typeface="Calibri"/>
               </a:rPr>
-              <a:t> 0.00</a:t>
+              <a:t>CNY 17.32</a:t>
             </a:r>
           </a:p>
         </p:txBody>
@@ -5115,7 +5560,7 @@
                 </a:solidFill>
                 <a:latin typeface="Calibri"/>
               </a:rPr>
-              <a:t> 1.00</a:t>
+              <a:t>CNY 46.14</a:t>
             </a:r>
           </a:p>
         </p:txBody>
@@ -5172,7 +5617,7 @@
         <p:spPr>
           <a:xfrm>
             <a:off x="1280160" y="6400799"/>
-            <a:ext cx="2148839" cy="54864"/>
+            <a:ext cx="2573836" cy="54864"/>
           </a:xfrm>
           <a:prstGeom prst="rect">
             <a:avLst/>
@@ -5214,7 +5659,7 @@
         </p:nvSpPr>
         <p:spPr>
           <a:xfrm>
-            <a:off x="3346703" y="6345936"/>
+            <a:off x="3771700" y="6345936"/>
             <a:ext cx="164592" cy="164592"/>
           </a:xfrm>
           <a:prstGeom prst="diamond">
@@ -5257,7 +5702,7 @@
         </p:nvSpPr>
         <p:spPr>
           <a:xfrm>
-            <a:off x="2788920" y="6565392"/>
+            <a:off x="3213916" y="6565392"/>
             <a:ext cx="1280160" cy="182880"/>
           </a:xfrm>
           <a:prstGeom prst="rect">
@@ -5279,7 +5724,7 @@
                 </a:solidFill>
                 <a:latin typeface="Calibri"/>
               </a:rPr>
-              <a:t>Current   0.50</a:t>
+              <a:t>Current  CNY 34.58</a:t>
             </a:r>
           </a:p>
         </p:txBody>
@@ -6002,7 +6447,7 @@
                 </a:solidFill>
                 <a:latin typeface="Calibri"/>
               </a:rPr>
-              <a:t>Source: investing  |  Generated 13 May 2026  |  Analyst: Jabal Research</a:t>
+              <a:t>Source: investing, marketscreener, yahoo  |  Generated 13 May 2026  |  Analyst: Jabal Research</a:t>
             </a:r>
           </a:p>
         </p:txBody>
@@ -6548,7 +6993,7 @@
                 </a:solidFill>
                 <a:latin typeface="Calibri"/>
               </a:rPr>
-              <a:t>Jabal maintains a constructive view into the upcoming print. the company sits in the — sector (—). Street consensus is buy (15 analysts covering); consensus target 51.89. The thesis hinges on three factors: demand trajectory through H2, feedstock/input-cost discipline, and management's tone on guidance during the call. We expect the print itself to be within consensus bounds; the read on forward commentary is the swing factor.</a:t>
+              <a:t>Jabal maintains a constructive view into the upcoming print. Zijin Mining Group Company Limited sits in the Basic Materials sector (Gold). Street consensus is buy (15 analysts covering); consensus target 51.89. The shares trade at a P/E around 9.6x trailing earnings. The macro and commodity backdrop is anchored by copper at 9400 $/mt (+6.0% YoY); gold at 2375 $/oz (+18.0% YoY). Macro context: local-economy GDP growth recently at 2.5%. The thesis hinges on three factors: demand trajectory through H2, feedstock/input-cost discipline, and management's tone on guidance during the call. We expect the print itself to be within consensus bounds; the read on forward commentary is the swing factor.</a:t>
             </a:r>
           </a:p>
         </p:txBody>
@@ -7772,7 +8217,7 @@
                 </a:solidFill>
                 <a:latin typeface="Calibri"/>
               </a:rPr>
-              <a:t>—</a:t>
+              <a:t>3.20%</a:t>
             </a:r>
           </a:p>
         </p:txBody>
@@ -8963,7 +9408,7 @@
                 </a:solidFill>
                 <a:latin typeface="Calibri"/>
               </a:rPr>
-              <a:t>Source: investing  |  Generated 13 May 2026  |  Analyst: Jabal Research</a:t>
+              <a:t>Source: investing, marketscreener, yahoo  |  Generated 13 May 2026  |  Analyst: Jabal Research</a:t>
             </a:r>
           </a:p>
         </p:txBody>
@@ -9419,46 +9864,29 @@
                 </a:solidFill>
                 <a:latin typeface="Calibri"/>
               </a:rPr>
-              <a:t>52-WEEK PRICE  ·  </a:t>
-            </a:r>
-          </a:p>
-        </p:txBody>
-      </p:sp>
-      <p:sp>
-        <p:nvSpPr>
-          <p:cNvPr id="11" name="TextBox 10"/>
-          <p:cNvSpPr txBox="1"/>
-          <p:nvPr/>
-        </p:nvSpPr>
-        <p:spPr>
-          <a:xfrm>
-            <a:off x="411480" y="2894076"/>
-            <a:ext cx="2926079" cy="274320"/>
-          </a:xfrm>
-          <a:prstGeom prst="rect">
-            <a:avLst/>
-          </a:prstGeom>
-          <a:noFill/>
-        </p:spPr>
-        <p:txBody>
-          <a:bodyPr wrap="square" lIns="0" rIns="0" tIns="0" bIns="0" anchor="t">
-            <a:spAutoFit/>
-          </a:bodyPr>
-          <a:lstStyle/>
-          <a:p>
-            <a:pPr algn="ctr"/>
-            <a:r>
-              <a:rPr sz="1000" b="0">
-                <a:solidFill>
-                  <a:srgbClr val="9A9A9A"/>
-                </a:solidFill>
-                <a:latin typeface="Calibri"/>
-              </a:rPr>
-              <a:t>No price history available</a:t>
-            </a:r>
-          </a:p>
-        </p:txBody>
-      </p:sp>
+              <a:t>52-WEEK PRICE  ·  CNY</a:t>
+            </a:r>
+          </a:p>
+        </p:txBody>
+      </p:sp>
+      <p:graphicFrame>
+        <p:nvGraphicFramePr>
+          <p:cNvPr id="11" name="Chart 10"/>
+          <p:cNvGraphicFramePr>
+            <a:graphicFrameLocks noGrp="1"/>
+          </p:cNvGraphicFramePr>
+          <p:nvPr/>
+        </p:nvGraphicFramePr>
+        <p:xfrm>
+          <a:off x="411480" y="2029967"/>
+          <a:ext cx="2926079" cy="1920240"/>
+        </p:xfrm>
+        <a:graphic>
+          <a:graphicData uri="http://schemas.openxmlformats.org/drawingml/2006/chart">
+            <c:chart xmlns:c="http://schemas.openxmlformats.org/drawingml/2006/chart" r:id="rId2"/>
+          </a:graphicData>
+        </a:graphic>
+      </p:graphicFrame>
       <p:sp>
         <p:nvSpPr>
           <p:cNvPr id="12" name="TextBox 11"/>
@@ -9502,36 +9930,1467 @@
         </p:nvSpPr>
         <p:spPr>
           <a:xfrm>
-            <a:off x="3520440" y="2779776"/>
-            <a:ext cx="2926079" cy="274320"/>
-          </a:xfrm>
-          <a:prstGeom prst="rect">
-            <a:avLst/>
-          </a:prstGeom>
-          <a:noFill/>
-        </p:spPr>
-        <p:txBody>
-          <a:bodyPr wrap="square" lIns="0" rIns="0" tIns="0" bIns="0" anchor="t">
-            <a:spAutoFit/>
-          </a:bodyPr>
+            <a:off x="3520440" y="2066543"/>
+            <a:ext cx="502920" cy="182880"/>
+          </a:xfrm>
+          <a:prstGeom prst="rect">
+            <a:avLst/>
+          </a:prstGeom>
+          <a:noFill/>
+        </p:spPr>
+        <p:txBody>
+          <a:bodyPr wrap="square" lIns="0" rIns="0" tIns="0" bIns="0" anchor="t">
+            <a:spAutoFit/>
+          </a:bodyPr>
+          <a:lstStyle/>
+          <a:p>
+            <a:pPr algn="l"/>
+            <a:r>
+              <a:rPr sz="1000" b="0">
+                <a:solidFill>
+                  <a:srgbClr val="1A1A1A"/>
+                </a:solidFill>
+                <a:latin typeface="Calibri"/>
+              </a:rPr>
+              <a:t>FY2021</a:t>
+            </a:r>
+          </a:p>
+        </p:txBody>
+      </p:sp>
+      <p:sp>
+        <p:nvSpPr>
+          <p:cNvPr id="14" name="Rectangle 13"/>
+          <p:cNvSpPr/>
+          <p:nvPr/>
+        </p:nvSpPr>
+        <p:spPr>
+          <a:xfrm>
+            <a:off x="4023360" y="2121408"/>
+            <a:ext cx="1523840" cy="73152"/>
+          </a:xfrm>
+          <a:prstGeom prst="rect">
+            <a:avLst/>
+          </a:prstGeom>
+          <a:solidFill>
+            <a:srgbClr val="EFE8DC"/>
+          </a:solidFill>
+          <a:ln>
+            <a:noFill/>
+          </a:ln>
+        </p:spPr>
+        <p:style>
+          <a:lnRef idx="1">
+            <a:schemeClr val="accent1"/>
+          </a:lnRef>
+          <a:fillRef idx="3">
+            <a:schemeClr val="accent1"/>
+          </a:fillRef>
+          <a:effectRef idx="2">
+            <a:schemeClr val="accent1"/>
+          </a:effectRef>
+          <a:fontRef idx="minor">
+            <a:schemeClr val="lt1"/>
+          </a:fontRef>
+        </p:style>
+        <p:txBody>
+          <a:bodyPr rtlCol="0" anchor="ctr"/>
           <a:lstStyle/>
           <a:p>
             <a:pPr algn="ctr"/>
+          </a:p>
+        </p:txBody>
+      </p:sp>
+      <p:sp>
+        <p:nvSpPr>
+          <p:cNvPr id="15" name="Oval 14"/>
+          <p:cNvSpPr/>
+          <p:nvPr/>
+        </p:nvSpPr>
+        <p:spPr>
+          <a:xfrm>
+            <a:off x="5501480" y="2103120"/>
+            <a:ext cx="91440" cy="109728"/>
+          </a:xfrm>
+          <a:prstGeom prst="ellipse">
+            <a:avLst/>
+          </a:prstGeom>
+          <a:solidFill>
+            <a:srgbClr val="7E6849"/>
+          </a:solidFill>
+          <a:ln>
+            <a:noFill/>
+          </a:ln>
+        </p:spPr>
+        <p:style>
+          <a:lnRef idx="1">
+            <a:schemeClr val="accent1"/>
+          </a:lnRef>
+          <a:fillRef idx="3">
+            <a:schemeClr val="accent1"/>
+          </a:fillRef>
+          <a:effectRef idx="2">
+            <a:schemeClr val="accent1"/>
+          </a:effectRef>
+          <a:fontRef idx="minor">
+            <a:schemeClr val="lt1"/>
+          </a:fontRef>
+        </p:style>
+        <p:txBody>
+          <a:bodyPr rtlCol="0" anchor="ctr"/>
+          <a:lstStyle/>
+          <a:p>
+            <a:pPr algn="ctr"/>
+          </a:p>
+        </p:txBody>
+      </p:sp>
+      <p:sp>
+        <p:nvSpPr>
+          <p:cNvPr id="16" name="TextBox 15"/>
+          <p:cNvSpPr txBox="1"/>
+          <p:nvPr/>
+        </p:nvSpPr>
+        <p:spPr>
+          <a:xfrm>
+            <a:off x="5592920" y="2084831"/>
+            <a:ext cx="411480" cy="182880"/>
+          </a:xfrm>
+          <a:prstGeom prst="rect">
+            <a:avLst/>
+          </a:prstGeom>
+          <a:noFill/>
+        </p:spPr>
+        <p:txBody>
+          <a:bodyPr wrap="square" lIns="0" rIns="0" tIns="0" bIns="0" anchor="t">
+            <a:spAutoFit/>
+          </a:bodyPr>
+          <a:lstStyle/>
+          <a:p>
+            <a:pPr algn="l"/>
             <a:r>
               <a:rPr sz="1000" b="0">
                 <a:solidFill>
+                  <a:srgbClr val="1A1A1A"/>
+                </a:solidFill>
+                <a:latin typeface="Calibri"/>
+              </a:rPr>
+              <a:t>16.2x</a:t>
+            </a:r>
+          </a:p>
+        </p:txBody>
+      </p:sp>
+      <p:sp>
+        <p:nvSpPr>
+          <p:cNvPr id="17" name="TextBox 16"/>
+          <p:cNvSpPr txBox="1"/>
+          <p:nvPr/>
+        </p:nvSpPr>
+        <p:spPr>
+          <a:xfrm>
+            <a:off x="3520440" y="2340863"/>
+            <a:ext cx="502920" cy="182880"/>
+          </a:xfrm>
+          <a:prstGeom prst="rect">
+            <a:avLst/>
+          </a:prstGeom>
+          <a:noFill/>
+        </p:spPr>
+        <p:txBody>
+          <a:bodyPr wrap="square" lIns="0" rIns="0" tIns="0" bIns="0" anchor="t">
+            <a:spAutoFit/>
+          </a:bodyPr>
+          <a:lstStyle/>
+          <a:p>
+            <a:pPr algn="l"/>
+            <a:r>
+              <a:rPr sz="1000" b="0">
+                <a:solidFill>
+                  <a:srgbClr val="1A1A1A"/>
+                </a:solidFill>
+                <a:latin typeface="Calibri"/>
+              </a:rPr>
+              <a:t>FY2022</a:t>
+            </a:r>
+          </a:p>
+        </p:txBody>
+      </p:sp>
+      <p:sp>
+        <p:nvSpPr>
+          <p:cNvPr id="18" name="Rectangle 17"/>
+          <p:cNvSpPr/>
+          <p:nvPr/>
+        </p:nvSpPr>
+        <p:spPr>
+          <a:xfrm>
+            <a:off x="4023360" y="2395727"/>
+            <a:ext cx="985254" cy="73152"/>
+          </a:xfrm>
+          <a:prstGeom prst="rect">
+            <a:avLst/>
+          </a:prstGeom>
+          <a:solidFill>
+            <a:srgbClr val="EFE8DC"/>
+          </a:solidFill>
+          <a:ln>
+            <a:noFill/>
+          </a:ln>
+        </p:spPr>
+        <p:style>
+          <a:lnRef idx="1">
+            <a:schemeClr val="accent1"/>
+          </a:lnRef>
+          <a:fillRef idx="3">
+            <a:schemeClr val="accent1"/>
+          </a:fillRef>
+          <a:effectRef idx="2">
+            <a:schemeClr val="accent1"/>
+          </a:effectRef>
+          <a:fontRef idx="minor">
+            <a:schemeClr val="lt1"/>
+          </a:fontRef>
+        </p:style>
+        <p:txBody>
+          <a:bodyPr rtlCol="0" anchor="ctr"/>
+          <a:lstStyle/>
+          <a:p>
+            <a:pPr algn="ctr"/>
+          </a:p>
+        </p:txBody>
+      </p:sp>
+      <p:sp>
+        <p:nvSpPr>
+          <p:cNvPr id="19" name="Oval 18"/>
+          <p:cNvSpPr/>
+          <p:nvPr/>
+        </p:nvSpPr>
+        <p:spPr>
+          <a:xfrm>
+            <a:off x="4962894" y="2377439"/>
+            <a:ext cx="91440" cy="109728"/>
+          </a:xfrm>
+          <a:prstGeom prst="ellipse">
+            <a:avLst/>
+          </a:prstGeom>
+          <a:solidFill>
+            <a:srgbClr val="7E6849"/>
+          </a:solidFill>
+          <a:ln>
+            <a:noFill/>
+          </a:ln>
+        </p:spPr>
+        <p:style>
+          <a:lnRef idx="1">
+            <a:schemeClr val="accent1"/>
+          </a:lnRef>
+          <a:fillRef idx="3">
+            <a:schemeClr val="accent1"/>
+          </a:fillRef>
+          <a:effectRef idx="2">
+            <a:schemeClr val="accent1"/>
+          </a:effectRef>
+          <a:fontRef idx="minor">
+            <a:schemeClr val="lt1"/>
+          </a:fontRef>
+        </p:style>
+        <p:txBody>
+          <a:bodyPr rtlCol="0" anchor="ctr"/>
+          <a:lstStyle/>
+          <a:p>
+            <a:pPr algn="ctr"/>
+          </a:p>
+        </p:txBody>
+      </p:sp>
+      <p:sp>
+        <p:nvSpPr>
+          <p:cNvPr id="20" name="TextBox 19"/>
+          <p:cNvSpPr txBox="1"/>
+          <p:nvPr/>
+        </p:nvSpPr>
+        <p:spPr>
+          <a:xfrm>
+            <a:off x="5054334" y="2359151"/>
+            <a:ext cx="411480" cy="182880"/>
+          </a:xfrm>
+          <a:prstGeom prst="rect">
+            <a:avLst/>
+          </a:prstGeom>
+          <a:noFill/>
+        </p:spPr>
+        <p:txBody>
+          <a:bodyPr wrap="square" lIns="0" rIns="0" tIns="0" bIns="0" anchor="t">
+            <a:spAutoFit/>
+          </a:bodyPr>
+          <a:lstStyle/>
+          <a:p>
+            <a:pPr algn="l"/>
+            <a:r>
+              <a:rPr sz="1000" b="0">
+                <a:solidFill>
+                  <a:srgbClr val="1A1A1A"/>
+                </a:solidFill>
+                <a:latin typeface="Calibri"/>
+              </a:rPr>
+              <a:t>13.2x</a:t>
+            </a:r>
+          </a:p>
+        </p:txBody>
+      </p:sp>
+      <p:sp>
+        <p:nvSpPr>
+          <p:cNvPr id="21" name="TextBox 20"/>
+          <p:cNvSpPr txBox="1"/>
+          <p:nvPr/>
+        </p:nvSpPr>
+        <p:spPr>
+          <a:xfrm>
+            <a:off x="3520440" y="2615184"/>
+            <a:ext cx="502920" cy="182880"/>
+          </a:xfrm>
+          <a:prstGeom prst="rect">
+            <a:avLst/>
+          </a:prstGeom>
+          <a:noFill/>
+        </p:spPr>
+        <p:txBody>
+          <a:bodyPr wrap="square" lIns="0" rIns="0" tIns="0" bIns="0" anchor="t">
+            <a:spAutoFit/>
+          </a:bodyPr>
+          <a:lstStyle/>
+          <a:p>
+            <a:pPr algn="l"/>
+            <a:r>
+              <a:rPr sz="1000" b="0">
+                <a:solidFill>
+                  <a:srgbClr val="1A1A1A"/>
+                </a:solidFill>
+                <a:latin typeface="Calibri"/>
+              </a:rPr>
+              <a:t>FY2023</a:t>
+            </a:r>
+          </a:p>
+        </p:txBody>
+      </p:sp>
+      <p:sp>
+        <p:nvSpPr>
+          <p:cNvPr id="22" name="Rectangle 21"/>
+          <p:cNvSpPr/>
+          <p:nvPr/>
+        </p:nvSpPr>
+        <p:spPr>
+          <a:xfrm>
+            <a:off x="4023360" y="2670048"/>
+            <a:ext cx="1416123" cy="73152"/>
+          </a:xfrm>
+          <a:prstGeom prst="rect">
+            <a:avLst/>
+          </a:prstGeom>
+          <a:solidFill>
+            <a:srgbClr val="EFE8DC"/>
+          </a:solidFill>
+          <a:ln>
+            <a:noFill/>
+          </a:ln>
+        </p:spPr>
+        <p:style>
+          <a:lnRef idx="1">
+            <a:schemeClr val="accent1"/>
+          </a:lnRef>
+          <a:fillRef idx="3">
+            <a:schemeClr val="accent1"/>
+          </a:fillRef>
+          <a:effectRef idx="2">
+            <a:schemeClr val="accent1"/>
+          </a:effectRef>
+          <a:fontRef idx="minor">
+            <a:schemeClr val="lt1"/>
+          </a:fontRef>
+        </p:style>
+        <p:txBody>
+          <a:bodyPr rtlCol="0" anchor="ctr"/>
+          <a:lstStyle/>
+          <a:p>
+            <a:pPr algn="ctr"/>
+          </a:p>
+        </p:txBody>
+      </p:sp>
+      <p:sp>
+        <p:nvSpPr>
+          <p:cNvPr id="23" name="Oval 22"/>
+          <p:cNvSpPr/>
+          <p:nvPr/>
+        </p:nvSpPr>
+        <p:spPr>
+          <a:xfrm>
+            <a:off x="5393763" y="2651760"/>
+            <a:ext cx="91440" cy="109728"/>
+          </a:xfrm>
+          <a:prstGeom prst="ellipse">
+            <a:avLst/>
+          </a:prstGeom>
+          <a:solidFill>
+            <a:srgbClr val="7E6849"/>
+          </a:solidFill>
+          <a:ln>
+            <a:noFill/>
+          </a:ln>
+        </p:spPr>
+        <p:style>
+          <a:lnRef idx="1">
+            <a:schemeClr val="accent1"/>
+          </a:lnRef>
+          <a:fillRef idx="3">
+            <a:schemeClr val="accent1"/>
+          </a:fillRef>
+          <a:effectRef idx="2">
+            <a:schemeClr val="accent1"/>
+          </a:effectRef>
+          <a:fontRef idx="minor">
+            <a:schemeClr val="lt1"/>
+          </a:fontRef>
+        </p:style>
+        <p:txBody>
+          <a:bodyPr rtlCol="0" anchor="ctr"/>
+          <a:lstStyle/>
+          <a:p>
+            <a:pPr algn="ctr"/>
+          </a:p>
+        </p:txBody>
+      </p:sp>
+      <p:sp>
+        <p:nvSpPr>
+          <p:cNvPr id="24" name="TextBox 23"/>
+          <p:cNvSpPr txBox="1"/>
+          <p:nvPr/>
+        </p:nvSpPr>
+        <p:spPr>
+          <a:xfrm>
+            <a:off x="5485203" y="2633472"/>
+            <a:ext cx="411480" cy="182880"/>
+          </a:xfrm>
+          <a:prstGeom prst="rect">
+            <a:avLst/>
+          </a:prstGeom>
+          <a:noFill/>
+        </p:spPr>
+        <p:txBody>
+          <a:bodyPr wrap="square" lIns="0" rIns="0" tIns="0" bIns="0" anchor="t">
+            <a:spAutoFit/>
+          </a:bodyPr>
+          <a:lstStyle/>
+          <a:p>
+            <a:pPr algn="l"/>
+            <a:r>
+              <a:rPr sz="1000" b="0">
+                <a:solidFill>
+                  <a:srgbClr val="1A1A1A"/>
+                </a:solidFill>
+                <a:latin typeface="Calibri"/>
+              </a:rPr>
+              <a:t>15.6x</a:t>
+            </a:r>
+          </a:p>
+        </p:txBody>
+      </p:sp>
+      <p:sp>
+        <p:nvSpPr>
+          <p:cNvPr id="25" name="TextBox 24"/>
+          <p:cNvSpPr txBox="1"/>
+          <p:nvPr/>
+        </p:nvSpPr>
+        <p:spPr>
+          <a:xfrm>
+            <a:off x="3520440" y="2889503"/>
+            <a:ext cx="502920" cy="182880"/>
+          </a:xfrm>
+          <a:prstGeom prst="rect">
+            <a:avLst/>
+          </a:prstGeom>
+          <a:noFill/>
+        </p:spPr>
+        <p:txBody>
+          <a:bodyPr wrap="square" lIns="0" rIns="0" tIns="0" bIns="0" anchor="t">
+            <a:spAutoFit/>
+          </a:bodyPr>
+          <a:lstStyle/>
+          <a:p>
+            <a:pPr algn="l"/>
+            <a:r>
+              <a:rPr sz="1000" b="0">
+                <a:solidFill>
+                  <a:srgbClr val="1A1A1A"/>
+                </a:solidFill>
+                <a:latin typeface="Calibri"/>
+              </a:rPr>
+              <a:t>FY2024</a:t>
+            </a:r>
+          </a:p>
+        </p:txBody>
+      </p:sp>
+      <p:sp>
+        <p:nvSpPr>
+          <p:cNvPr id="26" name="Rectangle 25"/>
+          <p:cNvSpPr/>
+          <p:nvPr/>
+        </p:nvSpPr>
+        <p:spPr>
+          <a:xfrm>
+            <a:off x="4023360" y="2944368"/>
+            <a:ext cx="877536" cy="73152"/>
+          </a:xfrm>
+          <a:prstGeom prst="rect">
+            <a:avLst/>
+          </a:prstGeom>
+          <a:solidFill>
+            <a:srgbClr val="EFE8DC"/>
+          </a:solidFill>
+          <a:ln>
+            <a:noFill/>
+          </a:ln>
+        </p:spPr>
+        <p:style>
+          <a:lnRef idx="1">
+            <a:schemeClr val="accent1"/>
+          </a:lnRef>
+          <a:fillRef idx="3">
+            <a:schemeClr val="accent1"/>
+          </a:fillRef>
+          <a:effectRef idx="2">
+            <a:schemeClr val="accent1"/>
+          </a:effectRef>
+          <a:fontRef idx="minor">
+            <a:schemeClr val="lt1"/>
+          </a:fontRef>
+        </p:style>
+        <p:txBody>
+          <a:bodyPr rtlCol="0" anchor="ctr"/>
+          <a:lstStyle/>
+          <a:p>
+            <a:pPr algn="ctr"/>
+          </a:p>
+        </p:txBody>
+      </p:sp>
+      <p:sp>
+        <p:nvSpPr>
+          <p:cNvPr id="27" name="Oval 26"/>
+          <p:cNvSpPr/>
+          <p:nvPr/>
+        </p:nvSpPr>
+        <p:spPr>
+          <a:xfrm>
+            <a:off x="4855176" y="2926079"/>
+            <a:ext cx="91440" cy="109728"/>
+          </a:xfrm>
+          <a:prstGeom prst="ellipse">
+            <a:avLst/>
+          </a:prstGeom>
+          <a:solidFill>
+            <a:srgbClr val="7E6849"/>
+          </a:solidFill>
+          <a:ln>
+            <a:noFill/>
+          </a:ln>
+        </p:spPr>
+        <p:style>
+          <a:lnRef idx="1">
+            <a:schemeClr val="accent1"/>
+          </a:lnRef>
+          <a:fillRef idx="3">
+            <a:schemeClr val="accent1"/>
+          </a:fillRef>
+          <a:effectRef idx="2">
+            <a:schemeClr val="accent1"/>
+          </a:effectRef>
+          <a:fontRef idx="minor">
+            <a:schemeClr val="lt1"/>
+          </a:fontRef>
+        </p:style>
+        <p:txBody>
+          <a:bodyPr rtlCol="0" anchor="ctr"/>
+          <a:lstStyle/>
+          <a:p>
+            <a:pPr algn="ctr"/>
+          </a:p>
+        </p:txBody>
+      </p:sp>
+      <p:sp>
+        <p:nvSpPr>
+          <p:cNvPr id="28" name="TextBox 27"/>
+          <p:cNvSpPr txBox="1"/>
+          <p:nvPr/>
+        </p:nvSpPr>
+        <p:spPr>
+          <a:xfrm>
+            <a:off x="4946616" y="2907791"/>
+            <a:ext cx="411480" cy="182880"/>
+          </a:xfrm>
+          <a:prstGeom prst="rect">
+            <a:avLst/>
+          </a:prstGeom>
+          <a:noFill/>
+        </p:spPr>
+        <p:txBody>
+          <a:bodyPr wrap="square" lIns="0" rIns="0" tIns="0" bIns="0" anchor="t">
+            <a:spAutoFit/>
+          </a:bodyPr>
+          <a:lstStyle/>
+          <a:p>
+            <a:pPr algn="l"/>
+            <a:r>
+              <a:rPr sz="1000" b="0">
+                <a:solidFill>
+                  <a:srgbClr val="1A1A1A"/>
+                </a:solidFill>
+                <a:latin typeface="Calibri"/>
+              </a:rPr>
+              <a:t>12.6x</a:t>
+            </a:r>
+          </a:p>
+        </p:txBody>
+      </p:sp>
+      <p:sp>
+        <p:nvSpPr>
+          <p:cNvPr id="29" name="TextBox 28"/>
+          <p:cNvSpPr txBox="1"/>
+          <p:nvPr/>
+        </p:nvSpPr>
+        <p:spPr>
+          <a:xfrm>
+            <a:off x="3520440" y="3163824"/>
+            <a:ext cx="502920" cy="182880"/>
+          </a:xfrm>
+          <a:prstGeom prst="rect">
+            <a:avLst/>
+          </a:prstGeom>
+          <a:noFill/>
+        </p:spPr>
+        <p:txBody>
+          <a:bodyPr wrap="square" lIns="0" rIns="0" tIns="0" bIns="0" anchor="t">
+            <a:spAutoFit/>
+          </a:bodyPr>
+          <a:lstStyle/>
+          <a:p>
+            <a:pPr algn="l"/>
+            <a:r>
+              <a:rPr sz="1000" b="0">
+                <a:solidFill>
+                  <a:srgbClr val="1A1A1A"/>
+                </a:solidFill>
+                <a:latin typeface="Calibri"/>
+              </a:rPr>
+              <a:t>FY2025</a:t>
+            </a:r>
+          </a:p>
+        </p:txBody>
+      </p:sp>
+      <p:sp>
+        <p:nvSpPr>
+          <p:cNvPr id="30" name="Rectangle 29"/>
+          <p:cNvSpPr/>
+          <p:nvPr/>
+        </p:nvSpPr>
+        <p:spPr>
+          <a:xfrm>
+            <a:off x="4023360" y="3218688"/>
+            <a:ext cx="1846992" cy="73152"/>
+          </a:xfrm>
+          <a:prstGeom prst="rect">
+            <a:avLst/>
+          </a:prstGeom>
+          <a:solidFill>
+            <a:srgbClr val="EFE8DC"/>
+          </a:solidFill>
+          <a:ln>
+            <a:noFill/>
+          </a:ln>
+        </p:spPr>
+        <p:style>
+          <a:lnRef idx="1">
+            <a:schemeClr val="accent1"/>
+          </a:lnRef>
+          <a:fillRef idx="3">
+            <a:schemeClr val="accent1"/>
+          </a:fillRef>
+          <a:effectRef idx="2">
+            <a:schemeClr val="accent1"/>
+          </a:effectRef>
+          <a:fontRef idx="minor">
+            <a:schemeClr val="lt1"/>
+          </a:fontRef>
+        </p:style>
+        <p:txBody>
+          <a:bodyPr rtlCol="0" anchor="ctr"/>
+          <a:lstStyle/>
+          <a:p>
+            <a:pPr algn="ctr"/>
+          </a:p>
+        </p:txBody>
+      </p:sp>
+      <p:sp>
+        <p:nvSpPr>
+          <p:cNvPr id="31" name="Oval 30"/>
+          <p:cNvSpPr/>
+          <p:nvPr/>
+        </p:nvSpPr>
+        <p:spPr>
+          <a:xfrm>
+            <a:off x="5824632" y="3200400"/>
+            <a:ext cx="91440" cy="109728"/>
+          </a:xfrm>
+          <a:prstGeom prst="ellipse">
+            <a:avLst/>
+          </a:prstGeom>
+          <a:solidFill>
+            <a:srgbClr val="7E6849"/>
+          </a:solidFill>
+          <a:ln>
+            <a:noFill/>
+          </a:ln>
+        </p:spPr>
+        <p:style>
+          <a:lnRef idx="1">
+            <a:schemeClr val="accent1"/>
+          </a:lnRef>
+          <a:fillRef idx="3">
+            <a:schemeClr val="accent1"/>
+          </a:fillRef>
+          <a:effectRef idx="2">
+            <a:schemeClr val="accent1"/>
+          </a:effectRef>
+          <a:fontRef idx="minor">
+            <a:schemeClr val="lt1"/>
+          </a:fontRef>
+        </p:style>
+        <p:txBody>
+          <a:bodyPr rtlCol="0" anchor="ctr"/>
+          <a:lstStyle/>
+          <a:p>
+            <a:pPr algn="ctr"/>
+          </a:p>
+        </p:txBody>
+      </p:sp>
+      <p:sp>
+        <p:nvSpPr>
+          <p:cNvPr id="32" name="TextBox 31"/>
+          <p:cNvSpPr txBox="1"/>
+          <p:nvPr/>
+        </p:nvSpPr>
+        <p:spPr>
+          <a:xfrm>
+            <a:off x="5916072" y="3182112"/>
+            <a:ext cx="411480" cy="182880"/>
+          </a:xfrm>
+          <a:prstGeom prst="rect">
+            <a:avLst/>
+          </a:prstGeom>
+          <a:noFill/>
+        </p:spPr>
+        <p:txBody>
+          <a:bodyPr wrap="square" lIns="0" rIns="0" tIns="0" bIns="0" anchor="t">
+            <a:spAutoFit/>
+          </a:bodyPr>
+          <a:lstStyle/>
+          <a:p>
+            <a:pPr algn="l"/>
+            <a:r>
+              <a:rPr sz="1000" b="0">
+                <a:solidFill>
+                  <a:srgbClr val="1A1A1A"/>
+                </a:solidFill>
+                <a:latin typeface="Calibri"/>
+              </a:rPr>
+              <a:t>18.0x</a:t>
+            </a:r>
+          </a:p>
+        </p:txBody>
+      </p:sp>
+      <p:sp>
+        <p:nvSpPr>
+          <p:cNvPr id="33" name="TextBox 32"/>
+          <p:cNvSpPr txBox="1"/>
+          <p:nvPr/>
+        </p:nvSpPr>
+        <p:spPr>
+          <a:xfrm>
+            <a:off x="3520440" y="3438144"/>
+            <a:ext cx="502920" cy="182880"/>
+          </a:xfrm>
+          <a:prstGeom prst="rect">
+            <a:avLst/>
+          </a:prstGeom>
+          <a:noFill/>
+        </p:spPr>
+        <p:txBody>
+          <a:bodyPr wrap="square" lIns="0" rIns="0" tIns="0" bIns="0" anchor="t">
+            <a:spAutoFit/>
+          </a:bodyPr>
+          <a:lstStyle/>
+          <a:p>
+            <a:pPr algn="l"/>
+            <a:r>
+              <a:rPr sz="1000" b="0">
+                <a:solidFill>
+                  <a:srgbClr val="1A1A1A"/>
+                </a:solidFill>
+                <a:latin typeface="Calibri"/>
+              </a:rPr>
+              <a:t>FY2026</a:t>
+            </a:r>
+          </a:p>
+        </p:txBody>
+      </p:sp>
+      <p:sp>
+        <p:nvSpPr>
+          <p:cNvPr id="34" name="Rectangle 33"/>
+          <p:cNvSpPr/>
+          <p:nvPr/>
+        </p:nvSpPr>
+        <p:spPr>
+          <a:xfrm>
+            <a:off x="4023360" y="3493008"/>
+            <a:ext cx="662102" cy="73152"/>
+          </a:xfrm>
+          <a:prstGeom prst="rect">
+            <a:avLst/>
+          </a:prstGeom>
+          <a:solidFill>
+            <a:srgbClr val="EFE8DC"/>
+          </a:solidFill>
+          <a:ln>
+            <a:noFill/>
+          </a:ln>
+        </p:spPr>
+        <p:style>
+          <a:lnRef idx="1">
+            <a:schemeClr val="accent1"/>
+          </a:lnRef>
+          <a:fillRef idx="3">
+            <a:schemeClr val="accent1"/>
+          </a:fillRef>
+          <a:effectRef idx="2">
+            <a:schemeClr val="accent1"/>
+          </a:effectRef>
+          <a:fontRef idx="minor">
+            <a:schemeClr val="lt1"/>
+          </a:fontRef>
+        </p:style>
+        <p:txBody>
+          <a:bodyPr rtlCol="0" anchor="ctr"/>
+          <a:lstStyle/>
+          <a:p>
+            <a:pPr algn="ctr"/>
+          </a:p>
+        </p:txBody>
+      </p:sp>
+      <p:sp>
+        <p:nvSpPr>
+          <p:cNvPr id="35" name="Oval 34"/>
+          <p:cNvSpPr/>
+          <p:nvPr/>
+        </p:nvSpPr>
+        <p:spPr>
+          <a:xfrm>
+            <a:off x="4639742" y="3474720"/>
+            <a:ext cx="91440" cy="109728"/>
+          </a:xfrm>
+          <a:prstGeom prst="ellipse">
+            <a:avLst/>
+          </a:prstGeom>
+          <a:solidFill>
+            <a:srgbClr val="7E6849"/>
+          </a:solidFill>
+          <a:ln>
+            <a:noFill/>
+          </a:ln>
+        </p:spPr>
+        <p:style>
+          <a:lnRef idx="1">
+            <a:schemeClr val="accent1"/>
+          </a:lnRef>
+          <a:fillRef idx="3">
+            <a:schemeClr val="accent1"/>
+          </a:fillRef>
+          <a:effectRef idx="2">
+            <a:schemeClr val="accent1"/>
+          </a:effectRef>
+          <a:fontRef idx="minor">
+            <a:schemeClr val="lt1"/>
+          </a:fontRef>
+        </p:style>
+        <p:txBody>
+          <a:bodyPr rtlCol="0" anchor="ctr"/>
+          <a:lstStyle/>
+          <a:p>
+            <a:pPr algn="ctr"/>
+          </a:p>
+        </p:txBody>
+      </p:sp>
+      <p:sp>
+        <p:nvSpPr>
+          <p:cNvPr id="36" name="TextBox 35"/>
+          <p:cNvSpPr txBox="1"/>
+          <p:nvPr/>
+        </p:nvSpPr>
+        <p:spPr>
+          <a:xfrm>
+            <a:off x="4731182" y="3456432"/>
+            <a:ext cx="411480" cy="182880"/>
+          </a:xfrm>
+          <a:prstGeom prst="rect">
+            <a:avLst/>
+          </a:prstGeom>
+          <a:noFill/>
+        </p:spPr>
+        <p:txBody>
+          <a:bodyPr wrap="square" lIns="0" rIns="0" tIns="0" bIns="0" anchor="t">
+            <a:spAutoFit/>
+          </a:bodyPr>
+          <a:lstStyle/>
+          <a:p>
+            <a:pPr algn="l"/>
+            <a:r>
+              <a:rPr sz="1000" b="0">
+                <a:solidFill>
+                  <a:srgbClr val="1A1A1A"/>
+                </a:solidFill>
+                <a:latin typeface="Calibri"/>
+              </a:rPr>
+              <a:t>11.4x</a:t>
+            </a:r>
+          </a:p>
+        </p:txBody>
+      </p:sp>
+      <p:sp>
+        <p:nvSpPr>
+          <p:cNvPr id="37" name="TextBox 36"/>
+          <p:cNvSpPr txBox="1"/>
+          <p:nvPr/>
+        </p:nvSpPr>
+        <p:spPr>
+          <a:xfrm>
+            <a:off x="3520440" y="3712463"/>
+            <a:ext cx="502920" cy="182880"/>
+          </a:xfrm>
+          <a:prstGeom prst="rect">
+            <a:avLst/>
+          </a:prstGeom>
+          <a:noFill/>
+        </p:spPr>
+        <p:txBody>
+          <a:bodyPr wrap="square" lIns="0" rIns="0" tIns="0" bIns="0" anchor="t">
+            <a:spAutoFit/>
+          </a:bodyPr>
+          <a:lstStyle/>
+          <a:p>
+            <a:pPr algn="l"/>
+            <a:r>
+              <a:rPr sz="1000" b="0">
+                <a:solidFill>
+                  <a:srgbClr val="1A1A1A"/>
+                </a:solidFill>
+                <a:latin typeface="Calibri"/>
+              </a:rPr>
+              <a:t>FY2027</a:t>
+            </a:r>
+          </a:p>
+        </p:txBody>
+      </p:sp>
+      <p:sp>
+        <p:nvSpPr>
+          <p:cNvPr id="38" name="Rectangle 37"/>
+          <p:cNvSpPr/>
+          <p:nvPr/>
+        </p:nvSpPr>
+        <p:spPr>
+          <a:xfrm>
+            <a:off x="4023360" y="3767327"/>
+            <a:ext cx="446667" cy="73152"/>
+          </a:xfrm>
+          <a:prstGeom prst="rect">
+            <a:avLst/>
+          </a:prstGeom>
+          <a:solidFill>
+            <a:srgbClr val="EFE8DC"/>
+          </a:solidFill>
+          <a:ln>
+            <a:noFill/>
+          </a:ln>
+        </p:spPr>
+        <p:style>
+          <a:lnRef idx="1">
+            <a:schemeClr val="accent1"/>
+          </a:lnRef>
+          <a:fillRef idx="3">
+            <a:schemeClr val="accent1"/>
+          </a:fillRef>
+          <a:effectRef idx="2">
+            <a:schemeClr val="accent1"/>
+          </a:effectRef>
+          <a:fontRef idx="minor">
+            <a:schemeClr val="lt1"/>
+          </a:fontRef>
+        </p:style>
+        <p:txBody>
+          <a:bodyPr rtlCol="0" anchor="ctr"/>
+          <a:lstStyle/>
+          <a:p>
+            <a:pPr algn="ctr"/>
+          </a:p>
+        </p:txBody>
+      </p:sp>
+      <p:sp>
+        <p:nvSpPr>
+          <p:cNvPr id="39" name="Oval 38"/>
+          <p:cNvSpPr/>
+          <p:nvPr/>
+        </p:nvSpPr>
+        <p:spPr>
+          <a:xfrm>
+            <a:off x="4424307" y="3749039"/>
+            <a:ext cx="91440" cy="109728"/>
+          </a:xfrm>
+          <a:prstGeom prst="ellipse">
+            <a:avLst/>
+          </a:prstGeom>
+          <a:solidFill>
+            <a:srgbClr val="7E6849"/>
+          </a:solidFill>
+          <a:ln>
+            <a:noFill/>
+          </a:ln>
+        </p:spPr>
+        <p:style>
+          <a:lnRef idx="1">
+            <a:schemeClr val="accent1"/>
+          </a:lnRef>
+          <a:fillRef idx="3">
+            <a:schemeClr val="accent1"/>
+          </a:fillRef>
+          <a:effectRef idx="2">
+            <a:schemeClr val="accent1"/>
+          </a:effectRef>
+          <a:fontRef idx="minor">
+            <a:schemeClr val="lt1"/>
+          </a:fontRef>
+        </p:style>
+        <p:txBody>
+          <a:bodyPr rtlCol="0" anchor="ctr"/>
+          <a:lstStyle/>
+          <a:p>
+            <a:pPr algn="ctr"/>
+          </a:p>
+        </p:txBody>
+      </p:sp>
+      <p:sp>
+        <p:nvSpPr>
+          <p:cNvPr id="40" name="TextBox 39"/>
+          <p:cNvSpPr txBox="1"/>
+          <p:nvPr/>
+        </p:nvSpPr>
+        <p:spPr>
+          <a:xfrm>
+            <a:off x="4515747" y="3730751"/>
+            <a:ext cx="411480" cy="182880"/>
+          </a:xfrm>
+          <a:prstGeom prst="rect">
+            <a:avLst/>
+          </a:prstGeom>
+          <a:noFill/>
+        </p:spPr>
+        <p:txBody>
+          <a:bodyPr wrap="square" lIns="0" rIns="0" tIns="0" bIns="0" anchor="t">
+            <a:spAutoFit/>
+          </a:bodyPr>
+          <a:lstStyle/>
+          <a:p>
+            <a:pPr algn="l"/>
+            <a:r>
+              <a:rPr sz="1000" b="0">
+                <a:solidFill>
+                  <a:srgbClr val="1A1A1A"/>
+                </a:solidFill>
+                <a:latin typeface="Calibri"/>
+              </a:rPr>
+              <a:t>10.2x</a:t>
+            </a:r>
+          </a:p>
+        </p:txBody>
+      </p:sp>
+      <p:sp>
+        <p:nvSpPr>
+          <p:cNvPr id="41" name="TextBox 40"/>
+          <p:cNvSpPr txBox="1"/>
+          <p:nvPr/>
+        </p:nvSpPr>
+        <p:spPr>
+          <a:xfrm>
+            <a:off x="3520440" y="3986783"/>
+            <a:ext cx="502920" cy="182880"/>
+          </a:xfrm>
+          <a:prstGeom prst="rect">
+            <a:avLst/>
+          </a:prstGeom>
+          <a:noFill/>
+        </p:spPr>
+        <p:txBody>
+          <a:bodyPr wrap="square" lIns="0" rIns="0" tIns="0" bIns="0" anchor="t">
+            <a:spAutoFit/>
+          </a:bodyPr>
+          <a:lstStyle/>
+          <a:p>
+            <a:pPr algn="l"/>
+            <a:r>
+              <a:rPr sz="1000" b="0">
+                <a:solidFill>
+                  <a:srgbClr val="1A1A1A"/>
+                </a:solidFill>
+                <a:latin typeface="Calibri"/>
+              </a:rPr>
+              <a:t>FY2028</a:t>
+            </a:r>
+          </a:p>
+        </p:txBody>
+      </p:sp>
+      <p:sp>
+        <p:nvSpPr>
+          <p:cNvPr id="42" name="Rectangle 41"/>
+          <p:cNvSpPr/>
+          <p:nvPr/>
+        </p:nvSpPr>
+        <p:spPr>
+          <a:xfrm>
+            <a:off x="4023360" y="4041647"/>
+            <a:ext cx="346131" cy="73152"/>
+          </a:xfrm>
+          <a:prstGeom prst="rect">
+            <a:avLst/>
+          </a:prstGeom>
+          <a:solidFill>
+            <a:srgbClr val="EFE8DC"/>
+          </a:solidFill>
+          <a:ln>
+            <a:noFill/>
+          </a:ln>
+        </p:spPr>
+        <p:style>
+          <a:lnRef idx="1">
+            <a:schemeClr val="accent1"/>
+          </a:lnRef>
+          <a:fillRef idx="3">
+            <a:schemeClr val="accent1"/>
+          </a:fillRef>
+          <a:effectRef idx="2">
+            <a:schemeClr val="accent1"/>
+          </a:effectRef>
+          <a:fontRef idx="minor">
+            <a:schemeClr val="lt1"/>
+          </a:fontRef>
+        </p:style>
+        <p:txBody>
+          <a:bodyPr rtlCol="0" anchor="ctr"/>
+          <a:lstStyle/>
+          <a:p>
+            <a:pPr algn="ctr"/>
+          </a:p>
+        </p:txBody>
+      </p:sp>
+      <p:sp>
+        <p:nvSpPr>
+          <p:cNvPr id="43" name="Oval 42"/>
+          <p:cNvSpPr/>
+          <p:nvPr/>
+        </p:nvSpPr>
+        <p:spPr>
+          <a:xfrm>
+            <a:off x="4323771" y="4023359"/>
+            <a:ext cx="91440" cy="109728"/>
+          </a:xfrm>
+          <a:prstGeom prst="ellipse">
+            <a:avLst/>
+          </a:prstGeom>
+          <a:solidFill>
+            <a:srgbClr val="7E6849"/>
+          </a:solidFill>
+          <a:ln>
+            <a:noFill/>
+          </a:ln>
+        </p:spPr>
+        <p:style>
+          <a:lnRef idx="1">
+            <a:schemeClr val="accent1"/>
+          </a:lnRef>
+          <a:fillRef idx="3">
+            <a:schemeClr val="accent1"/>
+          </a:fillRef>
+          <a:effectRef idx="2">
+            <a:schemeClr val="accent1"/>
+          </a:effectRef>
+          <a:fontRef idx="minor">
+            <a:schemeClr val="lt1"/>
+          </a:fontRef>
+        </p:style>
+        <p:txBody>
+          <a:bodyPr rtlCol="0" anchor="ctr"/>
+          <a:lstStyle/>
+          <a:p>
+            <a:pPr algn="ctr"/>
+          </a:p>
+        </p:txBody>
+      </p:sp>
+      <p:sp>
+        <p:nvSpPr>
+          <p:cNvPr id="44" name="TextBox 43"/>
+          <p:cNvSpPr txBox="1"/>
+          <p:nvPr/>
+        </p:nvSpPr>
+        <p:spPr>
+          <a:xfrm>
+            <a:off x="4415211" y="4005071"/>
+            <a:ext cx="411480" cy="182880"/>
+          </a:xfrm>
+          <a:prstGeom prst="rect">
+            <a:avLst/>
+          </a:prstGeom>
+          <a:noFill/>
+        </p:spPr>
+        <p:txBody>
+          <a:bodyPr wrap="square" lIns="0" rIns="0" tIns="0" bIns="0" anchor="t">
+            <a:spAutoFit/>
+          </a:bodyPr>
+          <a:lstStyle/>
+          <a:p>
+            <a:pPr algn="l"/>
+            <a:r>
+              <a:rPr sz="1000" b="0">
+                <a:solidFill>
+                  <a:srgbClr val="1A1A1A"/>
+                </a:solidFill>
+                <a:latin typeface="Calibri"/>
+              </a:rPr>
+              <a:t>9.6x</a:t>
+            </a:r>
+          </a:p>
+        </p:txBody>
+      </p:sp>
+      <p:sp>
+        <p:nvSpPr>
+          <p:cNvPr id="45" name="TextBox 44"/>
+          <p:cNvSpPr txBox="1"/>
+          <p:nvPr/>
+        </p:nvSpPr>
+        <p:spPr>
+          <a:xfrm>
+            <a:off x="3886200" y="4297680"/>
+            <a:ext cx="365760" cy="164592"/>
+          </a:xfrm>
+          <a:prstGeom prst="rect">
+            <a:avLst/>
+          </a:prstGeom>
+          <a:noFill/>
+        </p:spPr>
+        <p:txBody>
+          <a:bodyPr wrap="square" lIns="0" rIns="0" tIns="0" bIns="0" anchor="t">
+            <a:spAutoFit/>
+          </a:bodyPr>
+          <a:lstStyle/>
+          <a:p>
+            <a:pPr algn="l"/>
+            <a:r>
+              <a:rPr sz="700" b="0">
+                <a:solidFill>
                   <a:srgbClr val="9A9A9A"/>
                 </a:solidFill>
                 <a:latin typeface="Calibri"/>
               </a:rPr>
-              <a:t>No P/E history available</a:t>
-            </a:r>
-          </a:p>
-        </p:txBody>
-      </p:sp>
-      <p:sp>
-        <p:nvSpPr>
-          <p:cNvPr id="14" name="Rectangle 13"/>
+              <a:t>8x</a:t>
+            </a:r>
+          </a:p>
+        </p:txBody>
+      </p:sp>
+      <p:sp>
+        <p:nvSpPr>
+          <p:cNvPr id="46" name="TextBox 45"/>
+          <p:cNvSpPr txBox="1"/>
+          <p:nvPr/>
+        </p:nvSpPr>
+        <p:spPr>
+          <a:xfrm>
+            <a:off x="4663440" y="4297680"/>
+            <a:ext cx="365760" cy="164592"/>
+          </a:xfrm>
+          <a:prstGeom prst="rect">
+            <a:avLst/>
+          </a:prstGeom>
+          <a:noFill/>
+        </p:spPr>
+        <p:txBody>
+          <a:bodyPr wrap="square" lIns="0" rIns="0" tIns="0" bIns="0" anchor="t">
+            <a:spAutoFit/>
+          </a:bodyPr>
+          <a:lstStyle/>
+          <a:p>
+            <a:pPr algn="l"/>
+            <a:r>
+              <a:rPr sz="700" b="0">
+                <a:solidFill>
+                  <a:srgbClr val="9A9A9A"/>
+                </a:solidFill>
+                <a:latin typeface="Calibri"/>
+              </a:rPr>
+              <a:t>12x</a:t>
+            </a:r>
+          </a:p>
+        </p:txBody>
+      </p:sp>
+      <p:sp>
+        <p:nvSpPr>
+          <p:cNvPr id="47" name="TextBox 46"/>
+          <p:cNvSpPr txBox="1"/>
+          <p:nvPr/>
+        </p:nvSpPr>
+        <p:spPr>
+          <a:xfrm>
+            <a:off x="5440679" y="4297680"/>
+            <a:ext cx="365760" cy="164592"/>
+          </a:xfrm>
+          <a:prstGeom prst="rect">
+            <a:avLst/>
+          </a:prstGeom>
+          <a:noFill/>
+        </p:spPr>
+        <p:txBody>
+          <a:bodyPr wrap="square" lIns="0" rIns="0" tIns="0" bIns="0" anchor="t">
+            <a:spAutoFit/>
+          </a:bodyPr>
+          <a:lstStyle/>
+          <a:p>
+            <a:pPr algn="l"/>
+            <a:r>
+              <a:rPr sz="700" b="0">
+                <a:solidFill>
+                  <a:srgbClr val="9A9A9A"/>
+                </a:solidFill>
+                <a:latin typeface="Calibri"/>
+              </a:rPr>
+              <a:t>16x</a:t>
+            </a:r>
+          </a:p>
+        </p:txBody>
+      </p:sp>
+      <p:sp>
+        <p:nvSpPr>
+          <p:cNvPr id="48" name="TextBox 47"/>
+          <p:cNvSpPr txBox="1"/>
+          <p:nvPr/>
+        </p:nvSpPr>
+        <p:spPr>
+          <a:xfrm>
+            <a:off x="6217920" y="4297680"/>
+            <a:ext cx="365760" cy="164592"/>
+          </a:xfrm>
+          <a:prstGeom prst="rect">
+            <a:avLst/>
+          </a:prstGeom>
+          <a:noFill/>
+        </p:spPr>
+        <p:txBody>
+          <a:bodyPr wrap="square" lIns="0" rIns="0" tIns="0" bIns="0" anchor="t">
+            <a:spAutoFit/>
+          </a:bodyPr>
+          <a:lstStyle/>
+          <a:p>
+            <a:pPr algn="l"/>
+            <a:r>
+              <a:rPr sz="700" b="0">
+                <a:solidFill>
+                  <a:srgbClr val="9A9A9A"/>
+                </a:solidFill>
+                <a:latin typeface="Calibri"/>
+              </a:rPr>
+              <a:t>21x</a:t>
+            </a:r>
+          </a:p>
+        </p:txBody>
+      </p:sp>
+      <p:sp>
+        <p:nvSpPr>
+          <p:cNvPr id="49" name="Diamond 48"/>
+          <p:cNvSpPr/>
+          <p:nvPr/>
+        </p:nvSpPr>
+        <p:spPr>
+          <a:xfrm>
+            <a:off x="4296339" y="4242816"/>
+            <a:ext cx="146304" cy="146304"/>
+          </a:xfrm>
+          <a:prstGeom prst="diamond">
+            <a:avLst/>
+          </a:prstGeom>
+          <a:solidFill>
+            <a:srgbClr val="1A1A1A"/>
+          </a:solidFill>
+          <a:ln>
+            <a:noFill/>
+          </a:ln>
+        </p:spPr>
+        <p:style>
+          <a:lnRef idx="1">
+            <a:schemeClr val="accent1"/>
+          </a:lnRef>
+          <a:fillRef idx="3">
+            <a:schemeClr val="accent1"/>
+          </a:fillRef>
+          <a:effectRef idx="2">
+            <a:schemeClr val="accent1"/>
+          </a:effectRef>
+          <a:fontRef idx="minor">
+            <a:schemeClr val="lt1"/>
+          </a:fontRef>
+        </p:style>
+        <p:txBody>
+          <a:bodyPr rtlCol="0" anchor="ctr"/>
+          <a:lstStyle/>
+          <a:p>
+            <a:pPr algn="ctr"/>
+          </a:p>
+        </p:txBody>
+      </p:sp>
+      <p:sp>
+        <p:nvSpPr>
+          <p:cNvPr id="50" name="TextBox 49"/>
+          <p:cNvSpPr txBox="1"/>
+          <p:nvPr/>
+        </p:nvSpPr>
+        <p:spPr>
+          <a:xfrm>
+            <a:off x="4460931" y="4224528"/>
+            <a:ext cx="1280160" cy="164592"/>
+          </a:xfrm>
+          <a:prstGeom prst="rect">
+            <a:avLst/>
+          </a:prstGeom>
+          <a:noFill/>
+        </p:spPr>
+        <p:txBody>
+          <a:bodyPr wrap="square" lIns="0" rIns="0" tIns="0" bIns="0" anchor="t">
+            <a:spAutoFit/>
+          </a:bodyPr>
+          <a:lstStyle/>
+          <a:p>
+            <a:pPr algn="l"/>
+            <a:r>
+              <a:rPr sz="700" b="0">
+                <a:solidFill>
+                  <a:srgbClr val="1A1A1A"/>
+                </a:solidFill>
+                <a:latin typeface="Calibri"/>
+              </a:rPr>
+              <a:t>Current  (9.6x)</a:t>
+            </a:r>
+          </a:p>
+        </p:txBody>
+      </p:sp>
+      <p:sp>
+        <p:nvSpPr>
+          <p:cNvPr id="51" name="Rectangle 50"/>
           <p:cNvSpPr/>
           <p:nvPr/>
         </p:nvSpPr>
@@ -9575,7 +11434,7 @@
       </p:sp>
       <p:sp>
         <p:nvSpPr>
-          <p:cNvPr id="15" name="TextBox 14"/>
+          <p:cNvPr id="52" name="TextBox 51"/>
           <p:cNvSpPr txBox="1"/>
           <p:nvPr/>
         </p:nvSpPr>
@@ -9610,7 +11469,7 @@
       </p:sp>
       <p:sp>
         <p:nvSpPr>
-          <p:cNvPr id="16" name="TextBox 15"/>
+          <p:cNvPr id="53" name="TextBox 52"/>
           <p:cNvSpPr txBox="1"/>
           <p:nvPr/>
         </p:nvSpPr>
@@ -9645,7 +11504,7 @@
       </p:sp>
       <p:sp>
         <p:nvSpPr>
-          <p:cNvPr id="17" name="TextBox 16"/>
+          <p:cNvPr id="54" name="TextBox 53"/>
           <p:cNvSpPr txBox="1"/>
           <p:nvPr/>
         </p:nvSpPr>
@@ -9680,7 +11539,7 @@
       </p:sp>
       <p:sp>
         <p:nvSpPr>
-          <p:cNvPr id="18" name="TextBox 17"/>
+          <p:cNvPr id="55" name="TextBox 54"/>
           <p:cNvSpPr txBox="1"/>
           <p:nvPr/>
         </p:nvSpPr>
@@ -9715,7 +11574,7 @@
       </p:sp>
       <p:sp>
         <p:nvSpPr>
-          <p:cNvPr id="19" name="TextBox 18"/>
+          <p:cNvPr id="56" name="TextBox 55"/>
           <p:cNvSpPr txBox="1"/>
           <p:nvPr/>
         </p:nvSpPr>
@@ -9750,7 +11609,7 @@
       </p:sp>
       <p:sp>
         <p:nvSpPr>
-          <p:cNvPr id="20" name="TextBox 19"/>
+          <p:cNvPr id="57" name="TextBox 56"/>
           <p:cNvSpPr txBox="1"/>
           <p:nvPr/>
         </p:nvSpPr>
@@ -9785,7 +11644,7 @@
       </p:sp>
       <p:sp>
         <p:nvSpPr>
-          <p:cNvPr id="21" name="TextBox 20"/>
+          <p:cNvPr id="58" name="TextBox 57"/>
           <p:cNvSpPr txBox="1"/>
           <p:nvPr/>
         </p:nvSpPr>
@@ -9820,7 +11679,7 @@
       </p:sp>
       <p:sp>
         <p:nvSpPr>
-          <p:cNvPr id="22" name="Rectangle 21"/>
+          <p:cNvPr id="59" name="Rectangle 58"/>
           <p:cNvSpPr/>
           <p:nvPr/>
         </p:nvSpPr>
@@ -9864,7 +11723,217 @@
       </p:sp>
       <p:sp>
         <p:nvSpPr>
-          <p:cNvPr id="23" name="Rectangle 22"/>
+          <p:cNvPr id="60" name="TextBox 59"/>
+          <p:cNvSpPr txBox="1"/>
+          <p:nvPr/>
+        </p:nvSpPr>
+        <p:spPr>
+          <a:xfrm>
+            <a:off x="411480" y="5093208"/>
+            <a:ext cx="1874520" cy="256032"/>
+          </a:xfrm>
+          <a:prstGeom prst="rect">
+            <a:avLst/>
+          </a:prstGeom>
+          <a:noFill/>
+        </p:spPr>
+        <p:txBody>
+          <a:bodyPr wrap="square" lIns="0" rIns="0" tIns="0" bIns="0" anchor="t">
+            <a:spAutoFit/>
+          </a:bodyPr>
+          <a:lstStyle/>
+          <a:p>
+            <a:pPr algn="l"/>
+            <a:r>
+              <a:rPr sz="1000" b="0">
+                <a:solidFill>
+                  <a:srgbClr val="1A1A1A"/>
+                </a:solidFill>
+                <a:latin typeface="Calibri"/>
+              </a:rPr>
+              <a:t>iShares MSCI China ETF</a:t>
+            </a:r>
+          </a:p>
+        </p:txBody>
+      </p:sp>
+      <p:sp>
+        <p:nvSpPr>
+          <p:cNvPr id="61" name="TextBox 60"/>
+          <p:cNvSpPr txBox="1"/>
+          <p:nvPr/>
+        </p:nvSpPr>
+        <p:spPr>
+          <a:xfrm>
+            <a:off x="2331720" y="5093208"/>
+            <a:ext cx="960120" cy="256032"/>
+          </a:xfrm>
+          <a:prstGeom prst="rect">
+            <a:avLst/>
+          </a:prstGeom>
+          <a:noFill/>
+        </p:spPr>
+        <p:txBody>
+          <a:bodyPr wrap="square" lIns="0" rIns="0" tIns="0" bIns="0" anchor="t">
+            <a:spAutoFit/>
+          </a:bodyPr>
+          <a:lstStyle/>
+          <a:p>
+            <a:pPr algn="l"/>
+            <a:r>
+              <a:rPr sz="1000" b="0">
+                <a:solidFill>
+                  <a:srgbClr val="1A1A1A"/>
+                </a:solidFill>
+                <a:latin typeface="Calibri"/>
+              </a:rPr>
+              <a:t>MCHI</a:t>
+            </a:r>
+          </a:p>
+        </p:txBody>
+      </p:sp>
+      <p:sp>
+        <p:nvSpPr>
+          <p:cNvPr id="62" name="TextBox 61"/>
+          <p:cNvSpPr txBox="1"/>
+          <p:nvPr/>
+        </p:nvSpPr>
+        <p:spPr>
+          <a:xfrm>
+            <a:off x="3337560" y="5093208"/>
+            <a:ext cx="960120" cy="256032"/>
+          </a:xfrm>
+          <a:prstGeom prst="rect">
+            <a:avLst/>
+          </a:prstGeom>
+          <a:noFill/>
+        </p:spPr>
+        <p:txBody>
+          <a:bodyPr wrap="square" lIns="0" rIns="0" tIns="0" bIns="0" anchor="t">
+            <a:spAutoFit/>
+          </a:bodyPr>
+          <a:lstStyle/>
+          <a:p>
+            <a:pPr algn="r"/>
+            <a:r>
+              <a:rPr sz="1000" b="0">
+                <a:solidFill>
+                  <a:srgbClr val="1A1A1A"/>
+                </a:solidFill>
+                <a:latin typeface="Calibri"/>
+              </a:rPr>
+              <a:t>—</a:t>
+            </a:r>
+          </a:p>
+        </p:txBody>
+      </p:sp>
+      <p:sp>
+        <p:nvSpPr>
+          <p:cNvPr id="63" name="TextBox 62"/>
+          <p:cNvSpPr txBox="1"/>
+          <p:nvPr/>
+        </p:nvSpPr>
+        <p:spPr>
+          <a:xfrm>
+            <a:off x="4343400" y="5093208"/>
+            <a:ext cx="594359" cy="256032"/>
+          </a:xfrm>
+          <a:prstGeom prst="rect">
+            <a:avLst/>
+          </a:prstGeom>
+          <a:noFill/>
+        </p:spPr>
+        <p:txBody>
+          <a:bodyPr wrap="square" lIns="0" rIns="0" tIns="0" bIns="0" anchor="t">
+            <a:spAutoFit/>
+          </a:bodyPr>
+          <a:lstStyle/>
+          <a:p>
+            <a:pPr algn="r"/>
+            <a:r>
+              <a:rPr sz="1000" b="0">
+                <a:solidFill>
+                  <a:srgbClr val="1A1A1A"/>
+                </a:solidFill>
+                <a:latin typeface="Calibri"/>
+              </a:rPr>
+              <a:t>—</a:t>
+            </a:r>
+          </a:p>
+        </p:txBody>
+      </p:sp>
+      <p:sp>
+        <p:nvSpPr>
+          <p:cNvPr id="64" name="TextBox 63"/>
+          <p:cNvSpPr txBox="1"/>
+          <p:nvPr/>
+        </p:nvSpPr>
+        <p:spPr>
+          <a:xfrm>
+            <a:off x="4983480" y="5093208"/>
+            <a:ext cx="685800" cy="256032"/>
+          </a:xfrm>
+          <a:prstGeom prst="rect">
+            <a:avLst/>
+          </a:prstGeom>
+          <a:noFill/>
+        </p:spPr>
+        <p:txBody>
+          <a:bodyPr wrap="square" lIns="0" rIns="0" tIns="0" bIns="0" anchor="t">
+            <a:spAutoFit/>
+          </a:bodyPr>
+          <a:lstStyle/>
+          <a:p>
+            <a:pPr algn="r"/>
+            <a:r>
+              <a:rPr sz="1000" b="0">
+                <a:solidFill>
+                  <a:srgbClr val="1A1A1A"/>
+                </a:solidFill>
+                <a:latin typeface="Calibri"/>
+              </a:rPr>
+              <a:t>—</a:t>
+            </a:r>
+          </a:p>
+        </p:txBody>
+      </p:sp>
+      <p:sp>
+        <p:nvSpPr>
+          <p:cNvPr id="65" name="TextBox 64"/>
+          <p:cNvSpPr txBox="1"/>
+          <p:nvPr/>
+        </p:nvSpPr>
+        <p:spPr>
+          <a:xfrm>
+            <a:off x="5715000" y="5093208"/>
+            <a:ext cx="685800" cy="256032"/>
+          </a:xfrm>
+          <a:prstGeom prst="rect">
+            <a:avLst/>
+          </a:prstGeom>
+          <a:noFill/>
+        </p:spPr>
+        <p:txBody>
+          <a:bodyPr wrap="square" lIns="0" rIns="0" tIns="0" bIns="0" anchor="t">
+            <a:spAutoFit/>
+          </a:bodyPr>
+          <a:lstStyle/>
+          <a:p>
+            <a:pPr algn="r"/>
+            <a:r>
+              <a:rPr sz="1000" b="0">
+                <a:solidFill>
+                  <a:srgbClr val="1A1A1A"/>
+                </a:solidFill>
+                <a:latin typeface="Calibri"/>
+              </a:rPr>
+              <a:t>—</a:t>
+            </a:r>
+          </a:p>
+        </p:txBody>
+      </p:sp>
+      <p:sp>
+        <p:nvSpPr>
+          <p:cNvPr id="66" name="Rectangle 65"/>
           <p:cNvSpPr/>
           <p:nvPr/>
         </p:nvSpPr>
@@ -9908,7 +11977,7 @@
       </p:sp>
       <p:sp>
         <p:nvSpPr>
-          <p:cNvPr id="24" name="TextBox 23"/>
+          <p:cNvPr id="67" name="TextBox 66"/>
           <p:cNvSpPr txBox="1"/>
           <p:nvPr/>
         </p:nvSpPr>
@@ -9943,7 +12012,7 @@
       </p:sp>
       <p:sp>
         <p:nvSpPr>
-          <p:cNvPr id="25" name="Rectangle 24"/>
+          <p:cNvPr id="68" name="Rectangle 67"/>
           <p:cNvSpPr/>
           <p:nvPr/>
         </p:nvSpPr>
@@ -9989,7 +12058,7 @@
       </p:sp>
       <p:sp>
         <p:nvSpPr>
-          <p:cNvPr id="26" name="Rectangle 25"/>
+          <p:cNvPr id="69" name="Rectangle 68"/>
           <p:cNvSpPr/>
           <p:nvPr/>
         </p:nvSpPr>
@@ -10033,7 +12102,7 @@
       </p:sp>
       <p:sp>
         <p:nvSpPr>
-          <p:cNvPr id="27" name="TextBox 26"/>
+          <p:cNvPr id="70" name="TextBox 69"/>
           <p:cNvSpPr txBox="1"/>
           <p:nvPr/>
         </p:nvSpPr>
@@ -10068,7 +12137,7 @@
       </p:sp>
       <p:sp>
         <p:nvSpPr>
-          <p:cNvPr id="28" name="Rectangle 27"/>
+          <p:cNvPr id="71" name="Rectangle 70"/>
           <p:cNvSpPr/>
           <p:nvPr/>
         </p:nvSpPr>
@@ -10111,7 +12180,7 @@
       </p:sp>
       <p:sp>
         <p:nvSpPr>
-          <p:cNvPr id="29" name="TextBox 28"/>
+          <p:cNvPr id="72" name="TextBox 71"/>
           <p:cNvSpPr txBox="1"/>
           <p:nvPr/>
         </p:nvSpPr>
@@ -10146,7 +12215,7 @@
       </p:sp>
       <p:sp>
         <p:nvSpPr>
-          <p:cNvPr id="30" name="TextBox 29"/>
+          <p:cNvPr id="73" name="TextBox 72"/>
           <p:cNvSpPr txBox="1"/>
           <p:nvPr/>
         </p:nvSpPr>
@@ -10181,7 +12250,7 @@
       </p:sp>
       <p:sp>
         <p:nvSpPr>
-          <p:cNvPr id="31" name="Rectangle 30"/>
+          <p:cNvPr id="74" name="Rectangle 73"/>
           <p:cNvSpPr/>
           <p:nvPr/>
         </p:nvSpPr>
@@ -10227,7 +12296,7 @@
       </p:sp>
       <p:sp>
         <p:nvSpPr>
-          <p:cNvPr id="32" name="Rectangle 31"/>
+          <p:cNvPr id="75" name="Rectangle 74"/>
           <p:cNvSpPr/>
           <p:nvPr/>
         </p:nvSpPr>
@@ -10271,7 +12340,7 @@
       </p:sp>
       <p:sp>
         <p:nvSpPr>
-          <p:cNvPr id="33" name="TextBox 32"/>
+          <p:cNvPr id="76" name="TextBox 75"/>
           <p:cNvSpPr txBox="1"/>
           <p:nvPr/>
         </p:nvSpPr>
@@ -10306,7 +12375,7 @@
       </p:sp>
       <p:sp>
         <p:nvSpPr>
-          <p:cNvPr id="34" name="TextBox 33"/>
+          <p:cNvPr id="77" name="TextBox 76"/>
           <p:cNvSpPr txBox="1"/>
           <p:nvPr/>
         </p:nvSpPr>
@@ -10334,14 +12403,14 @@
                 </a:solidFill>
                 <a:latin typeface="Calibri"/>
               </a:rPr>
-              <a:t> 51.89</a:t>
-            </a:r>
-          </a:p>
-        </p:txBody>
-      </p:sp>
-      <p:sp>
-        <p:nvSpPr>
-          <p:cNvPr id="35" name="TextBox 34"/>
+              <a:t>CNY 51.89</a:t>
+            </a:r>
+          </a:p>
+        </p:txBody>
+      </p:sp>
+      <p:sp>
+        <p:nvSpPr>
+          <p:cNvPr id="78" name="TextBox 77"/>
           <p:cNvSpPr txBox="1"/>
           <p:nvPr/>
         </p:nvSpPr>
@@ -10369,14 +12438,49 @@
                 </a:solidFill>
                 <a:latin typeface="Calibri"/>
               </a:rPr>
-              <a:t>Range   44 — 58</a:t>
-            </a:r>
-          </a:p>
-        </p:txBody>
-      </p:sp>
-      <p:sp>
-        <p:nvSpPr>
-          <p:cNvPr id="36" name="Rectangle 35"/>
+              <a:t>Range  CNY 44 — 58</a:t>
+            </a:r>
+          </a:p>
+        </p:txBody>
+      </p:sp>
+      <p:sp>
+        <p:nvSpPr>
+          <p:cNvPr id="79" name="TextBox 78"/>
+          <p:cNvSpPr txBox="1"/>
+          <p:nvPr/>
+        </p:nvSpPr>
+        <p:spPr>
+          <a:xfrm>
+            <a:off x="2593848" y="8750808"/>
+            <a:ext cx="1706879" cy="164592"/>
+          </a:xfrm>
+          <a:prstGeom prst="rect">
+            <a:avLst/>
+          </a:prstGeom>
+          <a:noFill/>
+        </p:spPr>
+        <p:txBody>
+          <a:bodyPr wrap="square" lIns="0" rIns="0" tIns="0" bIns="0" anchor="t">
+            <a:spAutoFit/>
+          </a:bodyPr>
+          <a:lstStyle/>
+          <a:p>
+            <a:pPr algn="l"/>
+            <a:r>
+              <a:rPr sz="900" b="0">
+                <a:solidFill>
+                  <a:srgbClr val="2F7D4F"/>
+                </a:solidFill>
+                <a:latin typeface="Calibri"/>
+              </a:rPr>
+              <a:t>Implied +50.1% vs last close</a:t>
+            </a:r>
+          </a:p>
+        </p:txBody>
+      </p:sp>
+      <p:sp>
+        <p:nvSpPr>
+          <p:cNvPr id="80" name="Rectangle 79"/>
           <p:cNvSpPr/>
           <p:nvPr/>
         </p:nvSpPr>
@@ -10422,7 +12526,7 @@
       </p:sp>
       <p:sp>
         <p:nvSpPr>
-          <p:cNvPr id="37" name="Rectangle 36"/>
+          <p:cNvPr id="81" name="Rectangle 80"/>
           <p:cNvSpPr/>
           <p:nvPr/>
         </p:nvSpPr>
@@ -10466,7 +12570,7 @@
       </p:sp>
       <p:sp>
         <p:nvSpPr>
-          <p:cNvPr id="38" name="TextBox 37"/>
+          <p:cNvPr id="82" name="TextBox 81"/>
           <p:cNvSpPr txBox="1"/>
           <p:nvPr/>
         </p:nvSpPr>
@@ -10501,14 +12605,14 @@
       </p:sp>
       <p:sp>
         <p:nvSpPr>
-          <p:cNvPr id="39" name="TextBox 38"/>
-          <p:cNvSpPr txBox="1"/>
-          <p:nvPr/>
-        </p:nvSpPr>
-        <p:spPr>
-          <a:xfrm>
-            <a:off x="4666488" y="8275320"/>
-            <a:ext cx="1706879" cy="182880"/>
+          <p:cNvPr id="83" name="TextBox 82"/>
+          <p:cNvSpPr txBox="1"/>
+          <p:nvPr/>
+        </p:nvSpPr>
+        <p:spPr>
+          <a:xfrm>
+            <a:off x="4666488" y="8220456"/>
+            <a:ext cx="502920" cy="182880"/>
           </a:xfrm>
           <a:prstGeom prst="rect">
             <a:avLst/>
@@ -10523,20 +12627,195 @@
           <a:p>
             <a:pPr algn="l"/>
             <a:r>
-              <a:rPr sz="900" b="0">
-                <a:solidFill>
-                  <a:srgbClr val="9A9A9A"/>
-                </a:solidFill>
-                <a:latin typeface="Calibri"/>
-              </a:rPr>
-              <a:t>No broker actions in feed</a:t>
-            </a:r>
-          </a:p>
-        </p:txBody>
-      </p:sp>
-      <p:sp>
-        <p:nvSpPr>
-          <p:cNvPr id="40" name="Rectangle 39"/>
+              <a:rPr sz="1000" b="0">
+                <a:solidFill>
+                  <a:srgbClr val="5C5C5C"/>
+                </a:solidFill>
+                <a:latin typeface="Calibri"/>
+              </a:rPr>
+              <a:t>Mar. 24</a:t>
+            </a:r>
+          </a:p>
+        </p:txBody>
+      </p:sp>
+      <p:sp>
+        <p:nvSpPr>
+          <p:cNvPr id="84" name="TextBox 83"/>
+          <p:cNvSpPr txBox="1"/>
+          <p:nvPr/>
+        </p:nvSpPr>
+        <p:spPr>
+          <a:xfrm>
+            <a:off x="5196840" y="8220456"/>
+            <a:ext cx="1176527" cy="182880"/>
+          </a:xfrm>
+          <a:prstGeom prst="rect">
+            <a:avLst/>
+          </a:prstGeom>
+          <a:noFill/>
+        </p:spPr>
+        <p:txBody>
+          <a:bodyPr wrap="square" lIns="0" rIns="0" tIns="0" bIns="0" anchor="t">
+            <a:spAutoFit/>
+          </a:bodyPr>
+          <a:lstStyle/>
+          <a:p>
+            <a:pPr algn="l"/>
+            <a:r>
+              <a:rPr sz="1000" b="0">
+                <a:solidFill>
+                  <a:srgbClr val="1A1A1A"/>
+                </a:solidFill>
+                <a:latin typeface="Calibri"/>
+              </a:rPr>
+              <a:t>Jefferies Adjusts Zijin Mining Group's Price Target to HK$49.10 From HK$46.90, Keeps at Buy</a:t>
+            </a:r>
+          </a:p>
+        </p:txBody>
+      </p:sp>
+      <p:sp>
+        <p:nvSpPr>
+          <p:cNvPr id="85" name="TextBox 84"/>
+          <p:cNvSpPr txBox="1"/>
+          <p:nvPr/>
+        </p:nvSpPr>
+        <p:spPr>
+          <a:xfrm>
+            <a:off x="4666488" y="8458200"/>
+            <a:ext cx="502920" cy="182880"/>
+          </a:xfrm>
+          <a:prstGeom prst="rect">
+            <a:avLst/>
+          </a:prstGeom>
+          <a:noFill/>
+        </p:spPr>
+        <p:txBody>
+          <a:bodyPr wrap="square" lIns="0" rIns="0" tIns="0" bIns="0" anchor="t">
+            <a:spAutoFit/>
+          </a:bodyPr>
+          <a:lstStyle/>
+          <a:p>
+            <a:pPr algn="l"/>
+            <a:r>
+              <a:rPr sz="1000" b="0">
+                <a:solidFill>
+                  <a:srgbClr val="5C5C5C"/>
+                </a:solidFill>
+                <a:latin typeface="Calibri"/>
+              </a:rPr>
+              <a:t>Mar. 24</a:t>
+            </a:r>
+          </a:p>
+        </p:txBody>
+      </p:sp>
+      <p:sp>
+        <p:nvSpPr>
+          <p:cNvPr id="86" name="TextBox 85"/>
+          <p:cNvSpPr txBox="1"/>
+          <p:nvPr/>
+        </p:nvSpPr>
+        <p:spPr>
+          <a:xfrm>
+            <a:off x="5196840" y="8458200"/>
+            <a:ext cx="1176527" cy="182880"/>
+          </a:xfrm>
+          <a:prstGeom prst="rect">
+            <a:avLst/>
+          </a:prstGeom>
+          <a:noFill/>
+        </p:spPr>
+        <p:txBody>
+          <a:bodyPr wrap="square" lIns="0" rIns="0" tIns="0" bIns="0" anchor="t">
+            <a:spAutoFit/>
+          </a:bodyPr>
+          <a:lstStyle/>
+          <a:p>
+            <a:pPr algn="l"/>
+            <a:r>
+              <a:rPr sz="1000" b="0">
+                <a:solidFill>
+                  <a:srgbClr val="1A1A1A"/>
+                </a:solidFill>
+                <a:latin typeface="Calibri"/>
+              </a:rPr>
+              <a:t>Jefferies Adjusts Zijin Mining Group's Price Target to 45.30 Yuan From 43.30 Yuan, Keeps at Buy</a:t>
+            </a:r>
+          </a:p>
+        </p:txBody>
+      </p:sp>
+      <p:sp>
+        <p:nvSpPr>
+          <p:cNvPr id="87" name="TextBox 86"/>
+          <p:cNvSpPr txBox="1"/>
+          <p:nvPr/>
+        </p:nvSpPr>
+        <p:spPr>
+          <a:xfrm>
+            <a:off x="4666488" y="8695944"/>
+            <a:ext cx="502920" cy="182880"/>
+          </a:xfrm>
+          <a:prstGeom prst="rect">
+            <a:avLst/>
+          </a:prstGeom>
+          <a:noFill/>
+        </p:spPr>
+        <p:txBody>
+          <a:bodyPr wrap="square" lIns="0" rIns="0" tIns="0" bIns="0" anchor="t">
+            <a:spAutoFit/>
+          </a:bodyPr>
+          <a:lstStyle/>
+          <a:p>
+            <a:pPr algn="l"/>
+            <a:r>
+              <a:rPr sz="1000" b="0">
+                <a:solidFill>
+                  <a:srgbClr val="5C5C5C"/>
+                </a:solidFill>
+                <a:latin typeface="Calibri"/>
+              </a:rPr>
+              <a:t>Jan. 07</a:t>
+            </a:r>
+          </a:p>
+        </p:txBody>
+      </p:sp>
+      <p:sp>
+        <p:nvSpPr>
+          <p:cNvPr id="88" name="TextBox 87"/>
+          <p:cNvSpPr txBox="1"/>
+          <p:nvPr/>
+        </p:nvSpPr>
+        <p:spPr>
+          <a:xfrm>
+            <a:off x="5196840" y="8695944"/>
+            <a:ext cx="1176527" cy="182880"/>
+          </a:xfrm>
+          <a:prstGeom prst="rect">
+            <a:avLst/>
+          </a:prstGeom>
+          <a:noFill/>
+        </p:spPr>
+        <p:txBody>
+          <a:bodyPr wrap="square" lIns="0" rIns="0" tIns="0" bIns="0" anchor="t">
+            <a:spAutoFit/>
+          </a:bodyPr>
+          <a:lstStyle/>
+          <a:p>
+            <a:pPr algn="l"/>
+            <a:r>
+              <a:rPr sz="1000" b="0">
+                <a:solidFill>
+                  <a:srgbClr val="1A1A1A"/>
+                </a:solidFill>
+                <a:latin typeface="Calibri"/>
+              </a:rPr>
+              <a:t>Jefferies Adjusts Zijin Mining Group's Price Target to HK$46.90 from HK$38.10, Keeps at Buy</a:t>
+            </a:r>
+          </a:p>
+        </p:txBody>
+      </p:sp>
+      <p:sp>
+        <p:nvSpPr>
+          <p:cNvPr id="89" name="Rectangle 88"/>
           <p:cNvSpPr/>
           <p:nvPr/>
         </p:nvSpPr>
@@ -10580,7 +12859,7 @@
       </p:sp>
       <p:sp>
         <p:nvSpPr>
-          <p:cNvPr id="41" name="TextBox 40"/>
+          <p:cNvPr id="90" name="TextBox 89"/>
           <p:cNvSpPr txBox="1"/>
           <p:nvPr/>
         </p:nvSpPr>
@@ -10608,14 +12887,14 @@
                 </a:solidFill>
                 <a:latin typeface="Calibri"/>
               </a:rPr>
-              <a:t>Source: investing  |  Generated 13 May 2026  |  Analyst: Jabal Research</a:t>
-            </a:r>
-          </a:p>
-        </p:txBody>
-      </p:sp>
-      <p:sp>
-        <p:nvSpPr>
-          <p:cNvPr id="42" name="TextBox 41"/>
+              <a:t>Source: investing, marketscreener, yahoo  |  Generated 13 May 2026  |  Analyst: Jabal Research</a:t>
+            </a:r>
+          </a:p>
+        </p:txBody>
+      </p:sp>
+      <p:sp>
+        <p:nvSpPr>
+          <p:cNvPr id="91" name="TextBox 90"/>
           <p:cNvSpPr txBox="1"/>
           <p:nvPr/>
         </p:nvSpPr>
@@ -10650,7 +12929,7 @@
       </p:sp>
       <p:sp>
         <p:nvSpPr>
-          <p:cNvPr id="43" name="TextBox 42"/>
+          <p:cNvPr id="92" name="TextBox 91"/>
           <p:cNvSpPr txBox="1"/>
           <p:nvPr/>
         </p:nvSpPr>
@@ -10685,7 +12964,7 @@
       </p:sp>
       <p:sp>
         <p:nvSpPr>
-          <p:cNvPr id="44" name="TextBox 43"/>
+          <p:cNvPr id="93" name="TextBox 92"/>
           <p:cNvSpPr txBox="1"/>
           <p:nvPr/>
         </p:nvSpPr>

--- a/static/decks/2899.HK.pptx
+++ b/static/decks/2899.HK.pptx
@@ -11821,7 +11821,7 @@
                 </a:solidFill>
                 <a:latin typeface="Calibri"/>
               </a:rPr>
-              <a:t>—</a:t>
+              <a:t>$6.6B</a:t>
             </a:r>
           </a:p>
         </p:txBody>
@@ -11891,7 +11891,7 @@
                 </a:solidFill>
                 <a:latin typeface="Calibri"/>
               </a:rPr>
-              <a:t>—</a:t>
+              <a:t>+31.1% YTD</a:t>
             </a:r>
           </a:p>
         </p:txBody>
@@ -11922,11 +11922,11 @@
             <a:r>
               <a:rPr sz="1000" b="0">
                 <a:solidFill>
-                  <a:srgbClr val="1A1A1A"/>
-                </a:solidFill>
-                <a:latin typeface="Calibri"/>
-              </a:rPr>
-              <a:t>—</a:t>
+                  <a:srgbClr val="2F7D4F"/>
+                </a:solidFill>
+                <a:latin typeface="Calibri"/>
+              </a:rPr>
+              <a:t>+4.8%</a:t>
             </a:r>
           </a:p>
         </p:txBody>

--- a/static/decks/2899.HK.pptx
+++ b/static/decks/2899.HK.pptx
@@ -6447,7 +6447,7 @@
                 </a:solidFill>
                 <a:latin typeface="Calibri"/>
               </a:rPr>
-              <a:t>Source: investing, marketscreener, yahoo  |  Generated 13 May 2026  |  Analyst: Jabal Research</a:t>
+              <a:t>Source: investing, marketscreener, yahoo  |  Generated 14 May 2026  |  Analyst: Jabal Research</a:t>
             </a:r>
           </a:p>
         </p:txBody>
@@ -9408,7 +9408,7 @@
                 </a:solidFill>
                 <a:latin typeface="Calibri"/>
               </a:rPr>
-              <a:t>Source: investing, marketscreener, yahoo  |  Generated 13 May 2026  |  Analyst: Jabal Research</a:t>
+              <a:t>Source: investing, marketscreener, yahoo  |  Generated 14 May 2026  |  Analyst: Jabal Research</a:t>
             </a:r>
           </a:p>
         </p:txBody>
@@ -12887,7 +12887,7 @@
                 </a:solidFill>
                 <a:latin typeface="Calibri"/>
               </a:rPr>
-              <a:t>Source: investing, marketscreener, yahoo  |  Generated 13 May 2026  |  Analyst: Jabal Research</a:t>
+              <a:t>Source: investing, marketscreener, yahoo  |  Generated 14 May 2026  |  Analyst: Jabal Research</a:t>
             </a:r>
           </a:p>
         </p:txBody>
